--- a/Conceptos Básicos de IA/PPTXs/estado-del-arte.pptx
+++ b/Conceptos Básicos de IA/PPTXs/estado-del-arte.pptx
@@ -5,20 +5,19 @@
     <p:sldMasterId id="2147483648" r:id="rId1"/>
   </p:sldMasterIdLst>
   <p:sldIdLst>
-    <p:sldId id="256" r:id="rId7"/>
-    <p:sldId id="257" r:id="rId8"/>
-    <p:sldId id="258" r:id="rId9"/>
-    <p:sldId id="259" r:id="rId10"/>
-    <p:sldId id="260" r:id="rId11"/>
-    <p:sldId id="261" r:id="rId12"/>
-    <p:sldId id="262" r:id="rId13"/>
-    <p:sldId id="263" r:id="rId14"/>
-    <p:sldId id="264" r:id="rId15"/>
-    <p:sldId id="265" r:id="rId16"/>
-    <p:sldId id="266" r:id="rId17"/>
-    <p:sldId id="267" r:id="rId18"/>
+    <p:sldId id="256" r:id="rId2"/>
+    <p:sldId id="257" r:id="rId3"/>
+    <p:sldId id="258" r:id="rId4"/>
+    <p:sldId id="260" r:id="rId5"/>
+    <p:sldId id="261" r:id="rId6"/>
+    <p:sldId id="262" r:id="rId7"/>
+    <p:sldId id="263" r:id="rId8"/>
+    <p:sldId id="264" r:id="rId9"/>
+    <p:sldId id="265" r:id="rId10"/>
+    <p:sldId id="266" r:id="rId11"/>
+    <p:sldId id="267" r:id="rId12"/>
   </p:sldIdLst>
-  <p:sldSz cx="12191695" cy="6858000" type="screen4x3"/>
+  <p:sldSz cx="12192000" cy="6858000"/>
   <p:notesSz cx="6858000" cy="9144000"/>
   <p:defaultTextStyle>
     <a:defPPr>
@@ -115,6 +114,22 @@
       </a:defRPr>
     </a:lvl9pPr>
   </p:defaultTextStyle>
+  <p:extLst>
+    <p:ext uri="{EFAFB233-063F-42B5-8137-9DF3F51BA10A}">
+      <p15:sldGuideLst xmlns:p15="http://schemas.microsoft.com/office/powerpoint/2012/main">
+        <p15:guide id="1" orient="horz" pos="2160">
+          <p15:clr>
+            <a:srgbClr val="A4A3A4"/>
+          </p15:clr>
+        </p15:guide>
+        <p15:guide id="2" pos="2880">
+          <p15:clr>
+            <a:srgbClr val="A4A3A4"/>
+          </p15:clr>
+        </p15:guide>
+      </p15:sldGuideLst>
+    </p:ext>
+  </p:extLst>
 </p:presentation>
 </file>
 
@@ -156,10 +171,9 @@
           <a:lstStyle/>
           <a:p>
             <a:r>
-              <a:rPr lang="en-US" smtClean="0"/>
+              <a:rPr lang="en-US"/>
               <a:t>Click to edit Master title style</a:t>
             </a:r>
-            <a:endParaRPr lang="en-US"/>
           </a:p>
         </p:txBody>
       </p:sp>
@@ -275,10 +289,9 @@
           </a:lstStyle>
           <a:p>
             <a:r>
-              <a:rPr lang="en-US" smtClean="0"/>
+              <a:rPr lang="en-US"/>
               <a:t>Click to edit Master subtitle style</a:t>
             </a:r>
-            <a:endParaRPr lang="en-US"/>
           </a:p>
         </p:txBody>
       </p:sp>
@@ -299,7 +312,7 @@
           <a:p>
             <a:fld id="{5BCAD085-E8A6-8845-BD4E-CB4CCA059FC4}" type="datetimeFigureOut">
               <a:rPr lang="en-US" smtClean="0"/>
-              <a:t>1/27/13</a:t>
+              <a:t>8/19/26</a:t>
             </a:fld>
             <a:endParaRPr lang="en-US"/>
           </a:p>
@@ -341,7 +354,7 @@
           <a:p>
             <a:fld id="{C1FF6DA9-008F-8B48-92A6-B652298478BF}" type="slidenum">
               <a:rPr lang="en-US" smtClean="0"/>
-              <a:t>‹#›</a:t>
+              <a:t>‹Nº›</a:t>
             </a:fld>
             <a:endParaRPr lang="en-US"/>
           </a:p>
@@ -393,10 +406,9 @@
           <a:lstStyle/>
           <a:p>
             <a:r>
-              <a:rPr lang="en-US" smtClean="0"/>
+              <a:rPr lang="en-US"/>
               <a:t>Click to edit Master title style</a:t>
             </a:r>
-            <a:endParaRPr lang="en-US"/>
           </a:p>
         </p:txBody>
       </p:sp>
@@ -417,38 +429,37 @@
           <a:p>
             <a:pPr lvl="0"/>
             <a:r>
-              <a:rPr lang="en-US" smtClean="0"/>
+              <a:rPr lang="en-US"/>
               <a:t>Click to edit Master text styles</a:t>
             </a:r>
           </a:p>
           <a:p>
             <a:pPr lvl="1"/>
             <a:r>
-              <a:rPr lang="en-US" smtClean="0"/>
+              <a:rPr lang="en-US"/>
               <a:t>Second level</a:t>
             </a:r>
           </a:p>
           <a:p>
             <a:pPr lvl="2"/>
             <a:r>
-              <a:rPr lang="en-US" smtClean="0"/>
+              <a:rPr lang="en-US"/>
               <a:t>Third level</a:t>
             </a:r>
           </a:p>
           <a:p>
             <a:pPr lvl="3"/>
             <a:r>
-              <a:rPr lang="en-US" smtClean="0"/>
+              <a:rPr lang="en-US"/>
               <a:t>Fourth level</a:t>
             </a:r>
           </a:p>
           <a:p>
             <a:pPr lvl="4"/>
             <a:r>
-              <a:rPr lang="en-US" smtClean="0"/>
+              <a:rPr lang="en-US"/>
               <a:t>Fifth level</a:t>
             </a:r>
-            <a:endParaRPr lang="en-US"/>
           </a:p>
         </p:txBody>
       </p:sp>
@@ -469,7 +480,7 @@
           <a:p>
             <a:fld id="{5BCAD085-E8A6-8845-BD4E-CB4CCA059FC4}" type="datetimeFigureOut">
               <a:rPr lang="en-US" smtClean="0"/>
-              <a:t>1/27/13</a:t>
+              <a:t>8/19/26</a:t>
             </a:fld>
             <a:endParaRPr lang="en-US"/>
           </a:p>
@@ -511,7 +522,7 @@
           <a:p>
             <a:fld id="{C1FF6DA9-008F-8B48-92A6-B652298478BF}" type="slidenum">
               <a:rPr lang="en-US" smtClean="0"/>
-              <a:t>‹#›</a:t>
+              <a:t>‹Nº›</a:t>
             </a:fld>
             <a:endParaRPr lang="en-US"/>
           </a:p>
@@ -568,10 +579,9 @@
           <a:lstStyle/>
           <a:p>
             <a:r>
-              <a:rPr lang="en-US" smtClean="0"/>
+              <a:rPr lang="en-US"/>
               <a:t>Click to edit Master title style</a:t>
             </a:r>
-            <a:endParaRPr lang="en-US"/>
           </a:p>
         </p:txBody>
       </p:sp>
@@ -597,38 +607,37 @@
           <a:p>
             <a:pPr lvl="0"/>
             <a:r>
-              <a:rPr lang="en-US" smtClean="0"/>
+              <a:rPr lang="en-US"/>
               <a:t>Click to edit Master text styles</a:t>
             </a:r>
           </a:p>
           <a:p>
             <a:pPr lvl="1"/>
             <a:r>
-              <a:rPr lang="en-US" smtClean="0"/>
+              <a:rPr lang="en-US"/>
               <a:t>Second level</a:t>
             </a:r>
           </a:p>
           <a:p>
             <a:pPr lvl="2"/>
             <a:r>
-              <a:rPr lang="en-US" smtClean="0"/>
+              <a:rPr lang="en-US"/>
               <a:t>Third level</a:t>
             </a:r>
           </a:p>
           <a:p>
             <a:pPr lvl="3"/>
             <a:r>
-              <a:rPr lang="en-US" smtClean="0"/>
+              <a:rPr lang="en-US"/>
               <a:t>Fourth level</a:t>
             </a:r>
           </a:p>
           <a:p>
             <a:pPr lvl="4"/>
             <a:r>
-              <a:rPr lang="en-US" smtClean="0"/>
+              <a:rPr lang="en-US"/>
               <a:t>Fifth level</a:t>
             </a:r>
-            <a:endParaRPr lang="en-US"/>
           </a:p>
         </p:txBody>
       </p:sp>
@@ -649,7 +658,7 @@
           <a:p>
             <a:fld id="{5BCAD085-E8A6-8845-BD4E-CB4CCA059FC4}" type="datetimeFigureOut">
               <a:rPr lang="en-US" smtClean="0"/>
-              <a:t>1/27/13</a:t>
+              <a:t>8/19/26</a:t>
             </a:fld>
             <a:endParaRPr lang="en-US"/>
           </a:p>
@@ -691,7 +700,7 @@
           <a:p>
             <a:fld id="{C1FF6DA9-008F-8B48-92A6-B652298478BF}" type="slidenum">
               <a:rPr lang="en-US" smtClean="0"/>
-              <a:t>‹#›</a:t>
+              <a:t>‹Nº›</a:t>
             </a:fld>
             <a:endParaRPr lang="en-US"/>
           </a:p>
@@ -743,10 +752,9 @@
           <a:lstStyle/>
           <a:p>
             <a:r>
-              <a:rPr lang="en-US" smtClean="0"/>
+              <a:rPr lang="en-US"/>
               <a:t>Click to edit Master title style</a:t>
             </a:r>
-            <a:endParaRPr lang="en-US"/>
           </a:p>
         </p:txBody>
       </p:sp>
@@ -767,38 +775,37 @@
           <a:p>
             <a:pPr lvl="0"/>
             <a:r>
-              <a:rPr lang="en-US" smtClean="0"/>
+              <a:rPr lang="en-US"/>
               <a:t>Click to edit Master text styles</a:t>
             </a:r>
           </a:p>
           <a:p>
             <a:pPr lvl="1"/>
             <a:r>
-              <a:rPr lang="en-US" smtClean="0"/>
+              <a:rPr lang="en-US"/>
               <a:t>Second level</a:t>
             </a:r>
           </a:p>
           <a:p>
             <a:pPr lvl="2"/>
             <a:r>
-              <a:rPr lang="en-US" smtClean="0"/>
+              <a:rPr lang="en-US"/>
               <a:t>Third level</a:t>
             </a:r>
           </a:p>
           <a:p>
             <a:pPr lvl="3"/>
             <a:r>
-              <a:rPr lang="en-US" smtClean="0"/>
+              <a:rPr lang="en-US"/>
               <a:t>Fourth level</a:t>
             </a:r>
           </a:p>
           <a:p>
             <a:pPr lvl="4"/>
             <a:r>
-              <a:rPr lang="en-US" smtClean="0"/>
+              <a:rPr lang="en-US"/>
               <a:t>Fifth level</a:t>
             </a:r>
-            <a:endParaRPr lang="en-US"/>
           </a:p>
         </p:txBody>
       </p:sp>
@@ -819,7 +826,7 @@
           <a:p>
             <a:fld id="{5BCAD085-E8A6-8845-BD4E-CB4CCA059FC4}" type="datetimeFigureOut">
               <a:rPr lang="en-US" smtClean="0"/>
-              <a:t>1/27/13</a:t>
+              <a:t>8/19/26</a:t>
             </a:fld>
             <a:endParaRPr lang="en-US"/>
           </a:p>
@@ -861,7 +868,7 @@
           <a:p>
             <a:fld id="{C1FF6DA9-008F-8B48-92A6-B652298478BF}" type="slidenum">
               <a:rPr lang="en-US" smtClean="0"/>
-              <a:t>‹#›</a:t>
+              <a:t>‹Nº›</a:t>
             </a:fld>
             <a:endParaRPr lang="en-US"/>
           </a:p>
@@ -922,10 +929,9 @@
           </a:lstStyle>
           <a:p>
             <a:r>
-              <a:rPr lang="en-US" smtClean="0"/>
+              <a:rPr lang="en-US"/>
               <a:t>Click to edit Master title style</a:t>
             </a:r>
-            <a:endParaRPr lang="en-US"/>
           </a:p>
         </p:txBody>
       </p:sp>
@@ -1042,7 +1048,7 @@
           <a:p>
             <a:pPr lvl="0"/>
             <a:r>
-              <a:rPr lang="en-US" smtClean="0"/>
+              <a:rPr lang="en-US"/>
               <a:t>Click to edit Master text styles</a:t>
             </a:r>
           </a:p>
@@ -1065,7 +1071,7 @@
           <a:p>
             <a:fld id="{5BCAD085-E8A6-8845-BD4E-CB4CCA059FC4}" type="datetimeFigureOut">
               <a:rPr lang="en-US" smtClean="0"/>
-              <a:t>1/27/13</a:t>
+              <a:t>8/19/26</a:t>
             </a:fld>
             <a:endParaRPr lang="en-US"/>
           </a:p>
@@ -1107,7 +1113,7 @@
           <a:p>
             <a:fld id="{C1FF6DA9-008F-8B48-92A6-B652298478BF}" type="slidenum">
               <a:rPr lang="en-US" smtClean="0"/>
-              <a:t>‹#›</a:t>
+              <a:t>‹Nº›</a:t>
             </a:fld>
             <a:endParaRPr lang="en-US"/>
           </a:p>
@@ -1159,10 +1165,9 @@
           <a:lstStyle/>
           <a:p>
             <a:r>
-              <a:rPr lang="en-US" smtClean="0"/>
+              <a:rPr lang="en-US"/>
               <a:t>Click to edit Master title style</a:t>
             </a:r>
-            <a:endParaRPr lang="en-US"/>
           </a:p>
         </p:txBody>
       </p:sp>
@@ -1216,38 +1221,37 @@
           <a:p>
             <a:pPr lvl="0"/>
             <a:r>
-              <a:rPr lang="en-US" smtClean="0"/>
+              <a:rPr lang="en-US"/>
               <a:t>Click to edit Master text styles</a:t>
             </a:r>
           </a:p>
           <a:p>
             <a:pPr lvl="1"/>
             <a:r>
-              <a:rPr lang="en-US" smtClean="0"/>
+              <a:rPr lang="en-US"/>
               <a:t>Second level</a:t>
             </a:r>
           </a:p>
           <a:p>
             <a:pPr lvl="2"/>
             <a:r>
-              <a:rPr lang="en-US" smtClean="0"/>
+              <a:rPr lang="en-US"/>
               <a:t>Third level</a:t>
             </a:r>
           </a:p>
           <a:p>
             <a:pPr lvl="3"/>
             <a:r>
-              <a:rPr lang="en-US" smtClean="0"/>
+              <a:rPr lang="en-US"/>
               <a:t>Fourth level</a:t>
             </a:r>
           </a:p>
           <a:p>
             <a:pPr lvl="4"/>
             <a:r>
-              <a:rPr lang="en-US" smtClean="0"/>
+              <a:rPr lang="en-US"/>
               <a:t>Fifth level</a:t>
             </a:r>
-            <a:endParaRPr lang="en-US"/>
           </a:p>
         </p:txBody>
       </p:sp>
@@ -1301,38 +1305,37 @@
           <a:p>
             <a:pPr lvl="0"/>
             <a:r>
-              <a:rPr lang="en-US" smtClean="0"/>
+              <a:rPr lang="en-US"/>
               <a:t>Click to edit Master text styles</a:t>
             </a:r>
           </a:p>
           <a:p>
             <a:pPr lvl="1"/>
             <a:r>
-              <a:rPr lang="en-US" smtClean="0"/>
+              <a:rPr lang="en-US"/>
               <a:t>Second level</a:t>
             </a:r>
           </a:p>
           <a:p>
             <a:pPr lvl="2"/>
             <a:r>
-              <a:rPr lang="en-US" smtClean="0"/>
+              <a:rPr lang="en-US"/>
               <a:t>Third level</a:t>
             </a:r>
           </a:p>
           <a:p>
             <a:pPr lvl="3"/>
             <a:r>
-              <a:rPr lang="en-US" smtClean="0"/>
+              <a:rPr lang="en-US"/>
               <a:t>Fourth level</a:t>
             </a:r>
           </a:p>
           <a:p>
             <a:pPr lvl="4"/>
             <a:r>
-              <a:rPr lang="en-US" smtClean="0"/>
+              <a:rPr lang="en-US"/>
               <a:t>Fifth level</a:t>
             </a:r>
-            <a:endParaRPr lang="en-US"/>
           </a:p>
         </p:txBody>
       </p:sp>
@@ -1353,7 +1356,7 @@
           <a:p>
             <a:fld id="{5BCAD085-E8A6-8845-BD4E-CB4CCA059FC4}" type="datetimeFigureOut">
               <a:rPr lang="en-US" smtClean="0"/>
-              <a:t>1/27/13</a:t>
+              <a:t>8/19/26</a:t>
             </a:fld>
             <a:endParaRPr lang="en-US"/>
           </a:p>
@@ -1395,7 +1398,7 @@
           <a:p>
             <a:fld id="{C1FF6DA9-008F-8B48-92A6-B652298478BF}" type="slidenum">
               <a:rPr lang="en-US" smtClean="0"/>
-              <a:t>‹#›</a:t>
+              <a:t>‹Nº›</a:t>
             </a:fld>
             <a:endParaRPr lang="en-US"/>
           </a:p>
@@ -1451,10 +1454,9 @@
           </a:lstStyle>
           <a:p>
             <a:r>
-              <a:rPr lang="en-US" smtClean="0"/>
+              <a:rPr lang="en-US"/>
               <a:t>Click to edit Master title style</a:t>
             </a:r>
-            <a:endParaRPr lang="en-US"/>
           </a:p>
         </p:txBody>
       </p:sp>
@@ -1517,7 +1519,7 @@
           <a:p>
             <a:pPr lvl="0"/>
             <a:r>
-              <a:rPr lang="en-US" smtClean="0"/>
+              <a:rPr lang="en-US"/>
               <a:t>Click to edit Master text styles</a:t>
             </a:r>
           </a:p>
@@ -1573,38 +1575,37 @@
           <a:p>
             <a:pPr lvl="0"/>
             <a:r>
-              <a:rPr lang="en-US" smtClean="0"/>
+              <a:rPr lang="en-US"/>
               <a:t>Click to edit Master text styles</a:t>
             </a:r>
           </a:p>
           <a:p>
             <a:pPr lvl="1"/>
             <a:r>
-              <a:rPr lang="en-US" smtClean="0"/>
+              <a:rPr lang="en-US"/>
               <a:t>Second level</a:t>
             </a:r>
           </a:p>
           <a:p>
             <a:pPr lvl="2"/>
             <a:r>
-              <a:rPr lang="en-US" smtClean="0"/>
+              <a:rPr lang="en-US"/>
               <a:t>Third level</a:t>
             </a:r>
           </a:p>
           <a:p>
             <a:pPr lvl="3"/>
             <a:r>
-              <a:rPr lang="en-US" smtClean="0"/>
+              <a:rPr lang="en-US"/>
               <a:t>Fourth level</a:t>
             </a:r>
           </a:p>
           <a:p>
             <a:pPr lvl="4"/>
             <a:r>
-              <a:rPr lang="en-US" smtClean="0"/>
+              <a:rPr lang="en-US"/>
               <a:t>Fifth level</a:t>
             </a:r>
-            <a:endParaRPr lang="en-US"/>
           </a:p>
         </p:txBody>
       </p:sp>
@@ -1667,7 +1668,7 @@
           <a:p>
             <a:pPr lvl="0"/>
             <a:r>
-              <a:rPr lang="en-US" smtClean="0"/>
+              <a:rPr lang="en-US"/>
               <a:t>Click to edit Master text styles</a:t>
             </a:r>
           </a:p>
@@ -1723,38 +1724,37 @@
           <a:p>
             <a:pPr lvl="0"/>
             <a:r>
-              <a:rPr lang="en-US" smtClean="0"/>
+              <a:rPr lang="en-US"/>
               <a:t>Click to edit Master text styles</a:t>
             </a:r>
           </a:p>
           <a:p>
             <a:pPr lvl="1"/>
             <a:r>
-              <a:rPr lang="en-US" smtClean="0"/>
+              <a:rPr lang="en-US"/>
               <a:t>Second level</a:t>
             </a:r>
           </a:p>
           <a:p>
             <a:pPr lvl="2"/>
             <a:r>
-              <a:rPr lang="en-US" smtClean="0"/>
+              <a:rPr lang="en-US"/>
               <a:t>Third level</a:t>
             </a:r>
           </a:p>
           <a:p>
             <a:pPr lvl="3"/>
             <a:r>
-              <a:rPr lang="en-US" smtClean="0"/>
+              <a:rPr lang="en-US"/>
               <a:t>Fourth level</a:t>
             </a:r>
           </a:p>
           <a:p>
             <a:pPr lvl="4"/>
             <a:r>
-              <a:rPr lang="en-US" smtClean="0"/>
+              <a:rPr lang="en-US"/>
               <a:t>Fifth level</a:t>
             </a:r>
-            <a:endParaRPr lang="en-US"/>
           </a:p>
         </p:txBody>
       </p:sp>
@@ -1775,7 +1775,7 @@
           <a:p>
             <a:fld id="{5BCAD085-E8A6-8845-BD4E-CB4CCA059FC4}" type="datetimeFigureOut">
               <a:rPr lang="en-US" smtClean="0"/>
-              <a:t>1/27/13</a:t>
+              <a:t>8/19/26</a:t>
             </a:fld>
             <a:endParaRPr lang="en-US"/>
           </a:p>
@@ -1817,7 +1817,7 @@
           <a:p>
             <a:fld id="{C1FF6DA9-008F-8B48-92A6-B652298478BF}" type="slidenum">
               <a:rPr lang="en-US" smtClean="0"/>
-              <a:t>‹#›</a:t>
+              <a:t>‹Nº›</a:t>
             </a:fld>
             <a:endParaRPr lang="en-US"/>
           </a:p>
@@ -1869,10 +1869,9 @@
           <a:lstStyle/>
           <a:p>
             <a:r>
-              <a:rPr lang="en-US" smtClean="0"/>
+              <a:rPr lang="en-US"/>
               <a:t>Click to edit Master title style</a:t>
             </a:r>
-            <a:endParaRPr lang="en-US"/>
           </a:p>
         </p:txBody>
       </p:sp>
@@ -1893,7 +1892,7 @@
           <a:p>
             <a:fld id="{5BCAD085-E8A6-8845-BD4E-CB4CCA059FC4}" type="datetimeFigureOut">
               <a:rPr lang="en-US" smtClean="0"/>
-              <a:t>1/27/13</a:t>
+              <a:t>8/19/26</a:t>
             </a:fld>
             <a:endParaRPr lang="en-US"/>
           </a:p>
@@ -1935,7 +1934,7 @@
           <a:p>
             <a:fld id="{C1FF6DA9-008F-8B48-92A6-B652298478BF}" type="slidenum">
               <a:rPr lang="en-US" smtClean="0"/>
-              <a:t>‹#›</a:t>
+              <a:t>‹Nº›</a:t>
             </a:fld>
             <a:endParaRPr lang="en-US"/>
           </a:p>
@@ -1988,7 +1987,7 @@
           <a:p>
             <a:fld id="{5BCAD085-E8A6-8845-BD4E-CB4CCA059FC4}" type="datetimeFigureOut">
               <a:rPr lang="en-US" smtClean="0"/>
-              <a:t>1/27/13</a:t>
+              <a:t>8/19/26</a:t>
             </a:fld>
             <a:endParaRPr lang="en-US"/>
           </a:p>
@@ -2030,7 +2029,7 @@
           <a:p>
             <a:fld id="{C1FF6DA9-008F-8B48-92A6-B652298478BF}" type="slidenum">
               <a:rPr lang="en-US" smtClean="0"/>
-              <a:t>‹#›</a:t>
+              <a:t>‹Nº›</a:t>
             </a:fld>
             <a:endParaRPr lang="en-US"/>
           </a:p>
@@ -2091,10 +2090,9 @@
           </a:lstStyle>
           <a:p>
             <a:r>
-              <a:rPr lang="en-US" smtClean="0"/>
+              <a:rPr lang="en-US"/>
               <a:t>Click to edit Master title style</a:t>
             </a:r>
-            <a:endParaRPr lang="en-US"/>
           </a:p>
         </p:txBody>
       </p:sp>
@@ -2148,38 +2146,37 @@
           <a:p>
             <a:pPr lvl="0"/>
             <a:r>
-              <a:rPr lang="en-US" smtClean="0"/>
+              <a:rPr lang="en-US"/>
               <a:t>Click to edit Master text styles</a:t>
             </a:r>
           </a:p>
           <a:p>
             <a:pPr lvl="1"/>
             <a:r>
-              <a:rPr lang="en-US" smtClean="0"/>
+              <a:rPr lang="en-US"/>
               <a:t>Second level</a:t>
             </a:r>
           </a:p>
           <a:p>
             <a:pPr lvl="2"/>
             <a:r>
-              <a:rPr lang="en-US" smtClean="0"/>
+              <a:rPr lang="en-US"/>
               <a:t>Third level</a:t>
             </a:r>
           </a:p>
           <a:p>
             <a:pPr lvl="3"/>
             <a:r>
-              <a:rPr lang="en-US" smtClean="0"/>
+              <a:rPr lang="en-US"/>
               <a:t>Fourth level</a:t>
             </a:r>
           </a:p>
           <a:p>
             <a:pPr lvl="4"/>
             <a:r>
-              <a:rPr lang="en-US" smtClean="0"/>
+              <a:rPr lang="en-US"/>
               <a:t>Fifth level</a:t>
             </a:r>
-            <a:endParaRPr lang="en-US"/>
           </a:p>
         </p:txBody>
       </p:sp>
@@ -2242,7 +2239,7 @@
           <a:p>
             <a:pPr lvl="0"/>
             <a:r>
-              <a:rPr lang="en-US" smtClean="0"/>
+              <a:rPr lang="en-US"/>
               <a:t>Click to edit Master text styles</a:t>
             </a:r>
           </a:p>
@@ -2265,7 +2262,7 @@
           <a:p>
             <a:fld id="{5BCAD085-E8A6-8845-BD4E-CB4CCA059FC4}" type="datetimeFigureOut">
               <a:rPr lang="en-US" smtClean="0"/>
-              <a:t>1/27/13</a:t>
+              <a:t>8/19/26</a:t>
             </a:fld>
             <a:endParaRPr lang="en-US"/>
           </a:p>
@@ -2307,7 +2304,7 @@
           <a:p>
             <a:fld id="{C1FF6DA9-008F-8B48-92A6-B652298478BF}" type="slidenum">
               <a:rPr lang="en-US" smtClean="0"/>
-              <a:t>‹#›</a:t>
+              <a:t>‹Nº›</a:t>
             </a:fld>
             <a:endParaRPr lang="en-US"/>
           </a:p>
@@ -2368,10 +2365,9 @@
           </a:lstStyle>
           <a:p>
             <a:r>
-              <a:rPr lang="en-US" smtClean="0"/>
+              <a:rPr lang="en-US"/>
               <a:t>Click to edit Master title style</a:t>
             </a:r>
-            <a:endParaRPr lang="en-US"/>
           </a:p>
         </p:txBody>
       </p:sp>
@@ -2495,7 +2491,7 @@
           <a:p>
             <a:pPr lvl="0"/>
             <a:r>
-              <a:rPr lang="en-US" smtClean="0"/>
+              <a:rPr lang="en-US"/>
               <a:t>Click to edit Master text styles</a:t>
             </a:r>
           </a:p>
@@ -2518,7 +2514,7 @@
           <a:p>
             <a:fld id="{5BCAD085-E8A6-8845-BD4E-CB4CCA059FC4}" type="datetimeFigureOut">
               <a:rPr lang="en-US" smtClean="0"/>
-              <a:t>1/27/13</a:t>
+              <a:t>8/19/26</a:t>
             </a:fld>
             <a:endParaRPr lang="en-US"/>
           </a:p>
@@ -2560,7 +2556,7 @@
           <a:p>
             <a:fld id="{C1FF6DA9-008F-8B48-92A6-B652298478BF}" type="slidenum">
               <a:rPr lang="en-US" smtClean="0"/>
-              <a:t>‹#›</a:t>
+              <a:t>‹Nº›</a:t>
             </a:fld>
             <a:endParaRPr lang="en-US"/>
           </a:p>
@@ -2627,10 +2623,9 @@
           <a:lstStyle/>
           <a:p>
             <a:r>
-              <a:rPr lang="en-US" smtClean="0"/>
+              <a:rPr lang="en-US"/>
               <a:t>Click to edit Master title style</a:t>
             </a:r>
-            <a:endParaRPr lang="en-US"/>
           </a:p>
         </p:txBody>
       </p:sp>
@@ -2661,38 +2656,37 @@
           <a:p>
             <a:pPr lvl="0"/>
             <a:r>
-              <a:rPr lang="en-US" smtClean="0"/>
+              <a:rPr lang="en-US"/>
               <a:t>Click to edit Master text styles</a:t>
             </a:r>
           </a:p>
           <a:p>
             <a:pPr lvl="1"/>
             <a:r>
-              <a:rPr lang="en-US" smtClean="0"/>
+              <a:rPr lang="en-US"/>
               <a:t>Second level</a:t>
             </a:r>
           </a:p>
           <a:p>
             <a:pPr lvl="2"/>
             <a:r>
-              <a:rPr lang="en-US" smtClean="0"/>
+              <a:rPr lang="en-US"/>
               <a:t>Third level</a:t>
             </a:r>
           </a:p>
           <a:p>
             <a:pPr lvl="3"/>
             <a:r>
-              <a:rPr lang="en-US" smtClean="0"/>
+              <a:rPr lang="en-US"/>
               <a:t>Fourth level</a:t>
             </a:r>
           </a:p>
           <a:p>
             <a:pPr lvl="4"/>
             <a:r>
-              <a:rPr lang="en-US" smtClean="0"/>
+              <a:rPr lang="en-US"/>
               <a:t>Fifth level</a:t>
             </a:r>
-            <a:endParaRPr lang="en-US"/>
           </a:p>
         </p:txBody>
       </p:sp>
@@ -2731,7 +2725,7 @@
           <a:p>
             <a:fld id="{5BCAD085-E8A6-8845-BD4E-CB4CCA059FC4}" type="datetimeFigureOut">
               <a:rPr lang="en-US" smtClean="0"/>
-              <a:t>1/27/13</a:t>
+              <a:t>8/19/26</a:t>
             </a:fld>
             <a:endParaRPr lang="en-US"/>
           </a:p>
@@ -2809,7 +2803,7 @@
           <a:p>
             <a:fld id="{C1FF6DA9-008F-8B48-92A6-B652298478BF}" type="slidenum">
               <a:rPr lang="en-US" smtClean="0"/>
-              <a:t>‹#›</a:t>
+              <a:t>‹Nº›</a:t>
             </a:fld>
             <a:endParaRPr lang="en-US"/>
           </a:p>
@@ -3090,7 +3084,7 @@
 </file>
 
 <file path=ppt/slides/slide1.xml><?xml version="1.0" encoding="utf-8"?>
-<p:sld xmlns:a="http://schemas.openxmlformats.org/drawingml/2006/main" xmlns:p="http://schemas.openxmlformats.org/presentationml/2006/main" xmlns:r="http://schemas.openxmlformats.org/officeDocument/2006/relationships">
+<p:sld xmlns:a="http://schemas.openxmlformats.org/drawingml/2006/main" xmlns:r="http://schemas.openxmlformats.org/officeDocument/2006/relationships" xmlns:p="http://schemas.openxmlformats.org/presentationml/2006/main">
   <p:cSld>
     <p:spTree>
       <p:nvGrpSpPr>
@@ -3098,7 +3092,14 @@
         <p:cNvGrpSpPr/>
         <p:nvPr/>
       </p:nvGrpSpPr>
-      <p:grpSpPr/>
+      <p:grpSpPr>
+        <a:xfrm>
+          <a:off x="0" y="0"/>
+          <a:ext cx="0" cy="0"/>
+          <a:chOff x="0" y="0"/>
+          <a:chExt cx="0" cy="0"/>
+        </a:xfrm>
+      </p:grpSpPr>
       <p:sp>
         <p:nvSpPr>
           <p:cNvPr id="2" name="Rectangle 1"/>
@@ -3139,6 +3140,7 @@
           <a:lstStyle/>
           <a:p>
             <a:pPr algn="ctr"/>
+            <a:endParaRPr/>
           </a:p>
         </p:txBody>
       </p:sp>
@@ -3182,6 +3184,7 @@
           <a:lstStyle/>
           <a:p>
             <a:pPr algn="ctr"/>
+            <a:endParaRPr/>
           </a:p>
         </p:txBody>
       </p:sp>
@@ -3336,7 +3339,7 @@
 </file>
 
 <file path=ppt/slides/slide10.xml><?xml version="1.0" encoding="utf-8"?>
-<p:sld xmlns:a="http://schemas.openxmlformats.org/drawingml/2006/main" xmlns:p="http://schemas.openxmlformats.org/presentationml/2006/main" xmlns:r="http://schemas.openxmlformats.org/officeDocument/2006/relationships">
+<p:sld xmlns:a="http://schemas.openxmlformats.org/drawingml/2006/main" xmlns:r="http://schemas.openxmlformats.org/officeDocument/2006/relationships" xmlns:p="http://schemas.openxmlformats.org/presentationml/2006/main">
   <p:cSld>
     <p:spTree>
       <p:nvGrpSpPr>
@@ -3344,7 +3347,14 @@
         <p:cNvGrpSpPr/>
         <p:nvPr/>
       </p:nvGrpSpPr>
-      <p:grpSpPr/>
+      <p:grpSpPr>
+        <a:xfrm>
+          <a:off x="0" y="0"/>
+          <a:ext cx="0" cy="0"/>
+          <a:chOff x="0" y="0"/>
+          <a:chExt cx="0" cy="0"/>
+        </a:xfrm>
+      </p:grpSpPr>
       <p:sp>
         <p:nvSpPr>
           <p:cNvPr id="2" name="Rectangle 1"/>
@@ -3385,6 +3395,7 @@
           <a:lstStyle/>
           <a:p>
             <a:pPr algn="ctr"/>
+            <a:endParaRPr/>
           </a:p>
         </p:txBody>
       </p:sp>
@@ -3428,6 +3439,7 @@
           <a:lstStyle/>
           <a:p>
             <a:pPr algn="ctr"/>
+            <a:endParaRPr/>
           </a:p>
         </p:txBody>
       </p:sp>
@@ -3461,7 +3473,7 @@
                 </a:solidFill>
                 <a:latin typeface="Calibri"/>
               </a:rPr>
-              <a:t>Evaluación, seguridad y gobernanza</a:t>
+              <a:t>Hardware, escala y límites estructurales</a:t>
             </a:r>
           </a:p>
         </p:txBody>
@@ -3506,19 +3518,68 @@
           <a:lstStyle/>
           <a:p>
             <a:pPr algn="ctr"/>
-          </a:p>
-        </p:txBody>
-      </p:sp>
-      <p:sp>
-        <p:nvSpPr>
-          <p:cNvPr id="6" name="TextBox 5"/>
+            <a:endParaRPr/>
+          </a:p>
+        </p:txBody>
+      </p:sp>
+      <p:sp>
+        <p:nvSpPr>
+          <p:cNvPr id="6" name="Rounded Rectangle 5"/>
+          <p:cNvSpPr/>
+          <p:nvPr/>
+        </p:nvSpPr>
+        <p:spPr>
+          <a:xfrm>
+            <a:off x="457200" y="1371600"/>
+            <a:ext cx="5486400" cy="4480560"/>
+          </a:xfrm>
+          <a:prstGeom prst="roundRect">
+            <a:avLst>
+              <a:gd name="adj" fmla="val 8000"/>
+            </a:avLst>
+          </a:prstGeom>
+          <a:solidFill>
+            <a:srgbClr val="F6F8FB"/>
+          </a:solidFill>
+          <a:ln>
+            <a:solidFill>
+              <a:srgbClr val="D5DEE8"/>
+            </a:solidFill>
+          </a:ln>
+        </p:spPr>
+        <p:style>
+          <a:lnRef idx="1">
+            <a:schemeClr val="accent1"/>
+          </a:lnRef>
+          <a:fillRef idx="3">
+            <a:schemeClr val="accent1"/>
+          </a:fillRef>
+          <a:effectRef idx="2">
+            <a:schemeClr val="accent1"/>
+          </a:effectRef>
+          <a:fontRef idx="minor">
+            <a:schemeClr val="lt1"/>
+          </a:fontRef>
+        </p:style>
+        <p:txBody>
+          <a:bodyPr rtlCol="0" anchor="ctr"/>
+          <a:lstStyle/>
+          <a:p>
+            <a:pPr algn="ctr"/>
+            <a:endParaRPr/>
+          </a:p>
+        </p:txBody>
+      </p:sp>
+      <p:sp>
+        <p:nvSpPr>
+          <p:cNvPr id="7" name="TextBox 6"/>
           <p:cNvSpPr txBox="1"/>
           <p:nvPr/>
         </p:nvSpPr>
         <p:spPr>
           <a:xfrm>
-            <a:off x="640080" y="1325880"/>
-            <a:ext cx="10972800" cy="5029200"/>
+            <a:off x="658368" y="1536192"/>
+            <a:ext cx="5120640" cy="365760"/>
           </a:xfrm>
           <a:prstGeom prst="rect">
             <a:avLst/>
@@ -3531,86 +3592,177 @@
           </a:bodyPr>
           <a:lstStyle/>
           <a:p>
-            <a:pPr algn="l">
-              <a:lnSpc>
-                <a:spcPct val="115000"/>
-              </a:lnSpc>
-              <a:spcAft>
-                <a:spcPts val="1400"/>
-              </a:spcAft>
-            </a:pPr>
-            <a:r>
-              <a:rPr sz="2000" b="0" i="0">
-                <a:solidFill>
-                  <a:srgbClr val="2C3E50"/>
+            <a:pPr algn="l"/>
+            <a:r>
+              <a:rPr sz="1600" b="1" i="0">
+                <a:solidFill>
+                  <a:srgbClr val="0F2C59"/>
                 </a:solidFill>
                 <a:latin typeface="Calibri"/>
               </a:rPr>
-              <a:t>•  La evaluación es un cuello de botella: los benchmarks se saturan rápido.</a:t>
-            </a:r>
-          </a:p>
-          <a:p>
-            <a:pPr algn="l">
-              <a:lnSpc>
-                <a:spcPct val="115000"/>
-              </a:lnSpc>
-              <a:spcAft>
-                <a:spcPts val="1400"/>
-              </a:spcAft>
-            </a:pPr>
-            <a:r>
-              <a:rPr sz="2000" b="0" i="0">
+              <a:t>Hardware y datos</a:t>
+            </a:r>
+          </a:p>
+        </p:txBody>
+      </p:sp>
+      <p:sp>
+        <p:nvSpPr>
+          <p:cNvPr id="8" name="TextBox 7"/>
+          <p:cNvSpPr txBox="1"/>
+          <p:nvPr/>
+        </p:nvSpPr>
+        <p:spPr>
+          <a:xfrm>
+            <a:off x="658368" y="1901952"/>
+            <a:ext cx="5120640" cy="3794760"/>
+          </a:xfrm>
+          <a:prstGeom prst="rect">
+            <a:avLst/>
+          </a:prstGeom>
+          <a:noFill/>
+        </p:spPr>
+        <p:txBody>
+          <a:bodyPr wrap="square">
+            <a:spAutoFit/>
+          </a:bodyPr>
+          <a:lstStyle/>
+          <a:p>
+            <a:pPr algn="l"/>
+            <a:r>
+              <a:rPr sz="1400" b="0" i="0">
                 <a:solidFill>
                   <a:srgbClr val="2C3E50"/>
                 </a:solidFill>
                 <a:latin typeface="Calibri"/>
               </a:rPr>
-              <a:t>•  Se necesitan pruebas de capacidades reales, robustez, sesgo, seguridad y desempeño fuera de distribución.</a:t>
-            </a:r>
-          </a:p>
-          <a:p>
-            <a:pPr algn="l">
-              <a:lnSpc>
-                <a:spcPct val="115000"/>
-              </a:lnSpc>
-              <a:spcAft>
-                <a:spcPts val="1400"/>
-              </a:spcAft>
-            </a:pPr>
-            <a:r>
-              <a:rPr sz="2000" b="0" i="0">
-                <a:solidFill>
-                  <a:srgbClr val="2C3E50"/>
+              <a:t>GPU, TPU y aceleradores, junto con la escala de datos, condicionan quién puede entrenar los modelos más grandes.
+El impacto ambiental y la concentración de infraestructura son parte del análisis, no un apéndice.</a:t>
+            </a:r>
+          </a:p>
+        </p:txBody>
+      </p:sp>
+      <p:sp>
+        <p:nvSpPr>
+          <p:cNvPr id="9" name="Rounded Rectangle 8"/>
+          <p:cNvSpPr/>
+          <p:nvPr/>
+        </p:nvSpPr>
+        <p:spPr>
+          <a:xfrm>
+            <a:off x="6172200" y="1371600"/>
+            <a:ext cx="5486400" cy="4480560"/>
+          </a:xfrm>
+          <a:prstGeom prst="roundRect">
+            <a:avLst>
+              <a:gd name="adj" fmla="val 8000"/>
+            </a:avLst>
+          </a:prstGeom>
+          <a:solidFill>
+            <a:srgbClr val="F6F8FB"/>
+          </a:solidFill>
+          <a:ln>
+            <a:solidFill>
+              <a:srgbClr val="D5DEE8"/>
+            </a:solidFill>
+          </a:ln>
+        </p:spPr>
+        <p:style>
+          <a:lnRef idx="1">
+            <a:schemeClr val="accent1"/>
+          </a:lnRef>
+          <a:fillRef idx="3">
+            <a:schemeClr val="accent1"/>
+          </a:fillRef>
+          <a:effectRef idx="2">
+            <a:schemeClr val="accent1"/>
+          </a:effectRef>
+          <a:fontRef idx="minor">
+            <a:schemeClr val="lt1"/>
+          </a:fontRef>
+        </p:style>
+        <p:txBody>
+          <a:bodyPr rtlCol="0" anchor="ctr"/>
+          <a:lstStyle/>
+          <a:p>
+            <a:pPr algn="ctr"/>
+            <a:endParaRPr/>
+          </a:p>
+        </p:txBody>
+      </p:sp>
+      <p:sp>
+        <p:nvSpPr>
+          <p:cNvPr id="10" name="TextBox 9"/>
+          <p:cNvSpPr txBox="1"/>
+          <p:nvPr/>
+        </p:nvSpPr>
+        <p:spPr>
+          <a:xfrm>
+            <a:off x="6373368" y="1536192"/>
+            <a:ext cx="5120640" cy="365760"/>
+          </a:xfrm>
+          <a:prstGeom prst="rect">
+            <a:avLst/>
+          </a:prstGeom>
+          <a:noFill/>
+        </p:spPr>
+        <p:txBody>
+          <a:bodyPr wrap="square">
+            <a:spAutoFit/>
+          </a:bodyPr>
+          <a:lstStyle/>
+          <a:p>
+            <a:pPr algn="l"/>
+            <a:r>
+              <a:rPr sz="1600" b="1" i="0">
+                <a:solidFill>
+                  <a:srgbClr val="0F2C59"/>
                 </a:solidFill>
                 <a:latin typeface="Calibri"/>
               </a:rPr>
-              <a:t>•  Seguridad y gobernanza cubren uso dual, privacidad, propiedad intelectual, sesgos y autonomía de agentes.</a:t>
-            </a:r>
-          </a:p>
-          <a:p>
-            <a:pPr algn="l">
-              <a:lnSpc>
-                <a:spcPct val="115000"/>
-              </a:lnSpc>
-              <a:spcAft>
-                <a:spcPts val="1400"/>
-              </a:spcAft>
-            </a:pPr>
-            <a:r>
-              <a:rPr sz="2000" b="0" i="0">
+              <a:t>Límites que persisten</a:t>
+            </a:r>
+          </a:p>
+        </p:txBody>
+      </p:sp>
+      <p:sp>
+        <p:nvSpPr>
+          <p:cNvPr id="11" name="TextBox 10"/>
+          <p:cNvSpPr txBox="1"/>
+          <p:nvPr/>
+        </p:nvSpPr>
+        <p:spPr>
+          <a:xfrm>
+            <a:off x="6373368" y="1901952"/>
+            <a:ext cx="5120640" cy="3794760"/>
+          </a:xfrm>
+          <a:prstGeom prst="rect">
+            <a:avLst/>
+          </a:prstGeom>
+          <a:noFill/>
+        </p:spPr>
+        <p:txBody>
+          <a:bodyPr wrap="square">
+            <a:spAutoFit/>
+          </a:bodyPr>
+          <a:lstStyle/>
+          <a:p>
+            <a:pPr algn="l"/>
+            <a:r>
+              <a:rPr sz="1400" b="0" i="0">
                 <a:solidFill>
                   <a:srgbClr val="2C3E50"/>
                 </a:solidFill>
                 <a:latin typeface="Calibri"/>
               </a:rPr>
-              <a:t>•  Estos temas son parte del estado del arte tanto como las arquitecturas y el hardware.</a:t>
-            </a:r>
-          </a:p>
-        </p:txBody>
-      </p:sp>
-      <p:sp>
-        <p:nvSpPr>
-          <p:cNvPr id="7" name="Rectangle 6"/>
+              <a:t>Falta de comprensión causal robusta, fragilidad ante cambios de dominio y opacidad de las decisiones.
+Sigue siendo difícil garantizar verdades o un cumplimiento normativo estricto.</a:t>
+            </a:r>
+          </a:p>
+        </p:txBody>
+      </p:sp>
+      <p:sp>
+        <p:nvSpPr>
+          <p:cNvPr id="12" name="Rectangle 11"/>
           <p:cNvSpPr/>
           <p:nvPr/>
         </p:nvSpPr>
@@ -3648,12 +3800,13 @@
           <a:lstStyle/>
           <a:p>
             <a:pPr algn="ctr"/>
-          </a:p>
-        </p:txBody>
-      </p:sp>
-      <p:sp>
-        <p:nvSpPr>
-          <p:cNvPr id="8" name="TextBox 7"/>
+            <a:endParaRPr/>
+          </a:p>
+        </p:txBody>
+      </p:sp>
+      <p:sp>
+        <p:nvSpPr>
+          <p:cNvPr id="13" name="TextBox 12"/>
           <p:cNvSpPr txBox="1"/>
           <p:nvPr/>
         </p:nvSpPr>
@@ -3688,7 +3841,7 @@
       </p:sp>
       <p:sp>
         <p:nvSpPr>
-          <p:cNvPr id="9" name="TextBox 8"/>
+          <p:cNvPr id="14" name="TextBox 13"/>
           <p:cNvSpPr txBox="1"/>
           <p:nvPr/>
         </p:nvSpPr>
@@ -3716,7 +3869,7 @@
                 </a:solidFill>
                 <a:latin typeface="Calibri"/>
               </a:rPr>
-              <a:t>10 / 12</a:t>
+              <a:t>11 / 12</a:t>
             </a:r>
           </a:p>
         </p:txBody>
@@ -3730,7 +3883,7 @@
 </file>
 
 <file path=ppt/slides/slide11.xml><?xml version="1.0" encoding="utf-8"?>
-<p:sld xmlns:a="http://schemas.openxmlformats.org/drawingml/2006/main" xmlns:p="http://schemas.openxmlformats.org/presentationml/2006/main" xmlns:r="http://schemas.openxmlformats.org/officeDocument/2006/relationships">
+<p:sld xmlns:a="http://schemas.openxmlformats.org/drawingml/2006/main" xmlns:r="http://schemas.openxmlformats.org/officeDocument/2006/relationships" xmlns:p="http://schemas.openxmlformats.org/presentationml/2006/main">
   <p:cSld>
     <p:spTree>
       <p:nvGrpSpPr>
@@ -3738,7 +3891,14 @@
         <p:cNvGrpSpPr/>
         <p:nvPr/>
       </p:nvGrpSpPr>
-      <p:grpSpPr/>
+      <p:grpSpPr>
+        <a:xfrm>
+          <a:off x="0" y="0"/>
+          <a:ext cx="0" cy="0"/>
+          <a:chOff x="0" y="0"/>
+          <a:chExt cx="0" cy="0"/>
+        </a:xfrm>
+      </p:grpSpPr>
       <p:sp>
         <p:nvSpPr>
           <p:cNvPr id="2" name="Rectangle 1"/>
@@ -3779,6 +3939,7 @@
           <a:lstStyle/>
           <a:p>
             <a:pPr algn="ctr"/>
+            <a:endParaRPr/>
           </a:p>
         </p:txBody>
       </p:sp>
@@ -3822,6 +3983,7 @@
           <a:lstStyle/>
           <a:p>
             <a:pPr algn="ctr"/>
+            <a:endParaRPr/>
           </a:p>
         </p:txBody>
       </p:sp>
@@ -3855,7 +4017,7 @@
                 </a:solidFill>
                 <a:latin typeface="Calibri"/>
               </a:rPr>
-              <a:t>Hardware, escala y límites estructurales</a:t>
+              <a:t>Para discutir</a:t>
             </a:r>
           </a:p>
         </p:txBody>
@@ -3900,19 +4062,55 @@
           <a:lstStyle/>
           <a:p>
             <a:pPr algn="ctr"/>
-          </a:p>
-        </p:txBody>
-      </p:sp>
-      <p:sp>
-        <p:nvSpPr>
-          <p:cNvPr id="6" name="Rounded Rectangle 5"/>
+            <a:endParaRPr/>
+          </a:p>
+        </p:txBody>
+      </p:sp>
+      <p:sp>
+        <p:nvSpPr>
+          <p:cNvPr id="6" name="TextBox 5"/>
+          <p:cNvSpPr txBox="1"/>
+          <p:nvPr/>
+        </p:nvSpPr>
+        <p:spPr>
+          <a:xfrm>
+            <a:off x="502920" y="932688"/>
+            <a:ext cx="11155680" cy="365760"/>
+          </a:xfrm>
+          <a:prstGeom prst="rect">
+            <a:avLst/>
+          </a:prstGeom>
+          <a:noFill/>
+        </p:spPr>
+        <p:txBody>
+          <a:bodyPr wrap="square">
+            <a:spAutoFit/>
+          </a:bodyPr>
+          <a:lstStyle/>
+          <a:p>
+            <a:pPr algn="l"/>
+            <a:r>
+              <a:rPr sz="1600" b="0" i="1">
+                <a:solidFill>
+                  <a:srgbClr val="5D6D7E"/>
+                </a:solidFill>
+                <a:latin typeface="Calibri"/>
+              </a:rPr>
+              <a:t>Preguntas que recorren el resto del curso</a:t>
+            </a:r>
+          </a:p>
+        </p:txBody>
+      </p:sp>
+      <p:sp>
+        <p:nvSpPr>
+          <p:cNvPr id="7" name="Rounded Rectangle 6"/>
           <p:cNvSpPr/>
           <p:nvPr/>
         </p:nvSpPr>
         <p:spPr>
           <a:xfrm>
-            <a:off x="457200" y="1371600"/>
-            <a:ext cx="5486400" cy="4480560"/>
+            <a:off x="457200" y="1325880"/>
+            <a:ext cx="5532120" cy="2011680"/>
           </a:xfrm>
           <a:prstGeom prst="roundRect">
             <a:avLst>
@@ -3947,19 +4145,20 @@
           <a:lstStyle/>
           <a:p>
             <a:pPr algn="ctr"/>
-          </a:p>
-        </p:txBody>
-      </p:sp>
-      <p:sp>
-        <p:nvSpPr>
-          <p:cNvPr id="7" name="TextBox 6"/>
+            <a:endParaRPr/>
+          </a:p>
+        </p:txBody>
+      </p:sp>
+      <p:sp>
+        <p:nvSpPr>
+          <p:cNvPr id="8" name="TextBox 7"/>
           <p:cNvSpPr txBox="1"/>
           <p:nvPr/>
         </p:nvSpPr>
         <p:spPr>
           <a:xfrm>
-            <a:off x="658368" y="1536192"/>
-            <a:ext cx="5120640" cy="365760"/>
+            <a:off x="658368" y="1490472"/>
+            <a:ext cx="5166360" cy="365760"/>
           </a:xfrm>
           <a:prstGeom prst="rect">
             <a:avLst/>
@@ -3980,21 +4179,21 @@
                 </a:solidFill>
                 <a:latin typeface="Calibri"/>
               </a:rPr>
-              <a:t>Hardware y datos</a:t>
-            </a:r>
-          </a:p>
-        </p:txBody>
-      </p:sp>
-      <p:sp>
-        <p:nvSpPr>
-          <p:cNvPr id="8" name="TextBox 7"/>
+              <a:t>¿Capacidad o apariencia?</a:t>
+            </a:r>
+          </a:p>
+        </p:txBody>
+      </p:sp>
+      <p:sp>
+        <p:nvSpPr>
+          <p:cNvPr id="9" name="TextBox 8"/>
           <p:cNvSpPr txBox="1"/>
           <p:nvPr/>
         </p:nvSpPr>
         <p:spPr>
           <a:xfrm>
-            <a:off x="658368" y="1901952"/>
-            <a:ext cx="5120640" cy="3794760"/>
+            <a:off x="658368" y="1856232"/>
+            <a:ext cx="5166360" cy="1325880"/>
           </a:xfrm>
           <a:prstGeom prst="rect">
             <a:avLst/>
@@ -4015,22 +4214,21 @@
                 </a:solidFill>
                 <a:latin typeface="Calibri"/>
               </a:rPr>
-              <a:t>GPU, TPU y aceleradores, junto con la escala de datos, condicionan quién puede entrenar los modelos más grandes.
-El impacto ambiental y la concentración de infraestructura son parte del análisis, no un apéndice.</a:t>
-            </a:r>
-          </a:p>
-        </p:txBody>
-      </p:sp>
-      <p:sp>
-        <p:nvSpPr>
-          <p:cNvPr id="9" name="Rounded Rectangle 8"/>
+              <a:t>Un sistema fluido ¿entiende, o solo predice patrones convincentes?</a:t>
+            </a:r>
+          </a:p>
+        </p:txBody>
+      </p:sp>
+      <p:sp>
+        <p:nvSpPr>
+          <p:cNvPr id="10" name="Rounded Rectangle 9"/>
           <p:cNvSpPr/>
           <p:nvPr/>
         </p:nvSpPr>
         <p:spPr>
           <a:xfrm>
-            <a:off x="6172200" y="1371600"/>
-            <a:ext cx="5486400" cy="4480560"/>
+            <a:off x="6263640" y="1325880"/>
+            <a:ext cx="5532120" cy="2011680"/>
           </a:xfrm>
           <a:prstGeom prst="roundRect">
             <a:avLst>
@@ -4065,19 +4263,20 @@
           <a:lstStyle/>
           <a:p>
             <a:pPr algn="ctr"/>
-          </a:p>
-        </p:txBody>
-      </p:sp>
-      <p:sp>
-        <p:nvSpPr>
-          <p:cNvPr id="10" name="TextBox 9"/>
+            <a:endParaRPr/>
+          </a:p>
+        </p:txBody>
+      </p:sp>
+      <p:sp>
+        <p:nvSpPr>
+          <p:cNvPr id="11" name="TextBox 10"/>
           <p:cNvSpPr txBox="1"/>
           <p:nvPr/>
         </p:nvSpPr>
         <p:spPr>
           <a:xfrm>
-            <a:off x="6373368" y="1536192"/>
-            <a:ext cx="5120640" cy="365760"/>
+            <a:off x="6464808" y="1490472"/>
+            <a:ext cx="5166360" cy="365760"/>
           </a:xfrm>
           <a:prstGeom prst="rect">
             <a:avLst/>
@@ -4098,21 +4297,21 @@
                 </a:solidFill>
                 <a:latin typeface="Calibri"/>
               </a:rPr>
-              <a:t>Límites que persisten</a:t>
-            </a:r>
-          </a:p>
-        </p:txBody>
-      </p:sp>
-      <p:sp>
-        <p:nvSpPr>
-          <p:cNvPr id="11" name="TextBox 10"/>
+              <a:t>¿Dónde actúa la IA?</a:t>
+            </a:r>
+          </a:p>
+        </p:txBody>
+      </p:sp>
+      <p:sp>
+        <p:nvSpPr>
+          <p:cNvPr id="12" name="TextBox 11"/>
           <p:cNvSpPr txBox="1"/>
           <p:nvPr/>
         </p:nvSpPr>
         <p:spPr>
           <a:xfrm>
-            <a:off x="6373368" y="1901952"/>
-            <a:ext cx="5120640" cy="3794760"/>
+            <a:off x="6464808" y="1856232"/>
+            <a:ext cx="5166360" cy="1325880"/>
           </a:xfrm>
           <a:prstGeom prst="rect">
             <a:avLst/>
@@ -4133,351 +4332,20 @@
                 </a:solidFill>
                 <a:latin typeface="Calibri"/>
               </a:rPr>
-              <a:t>Falta de comprensión causal robusta, fragilidad ante cambios de dominio y opacidad de las decisiones.
-Sigue siendo difícil garantizar verdades o un cumplimiento normativo estricto.</a:t>
-            </a:r>
-          </a:p>
-        </p:txBody>
-      </p:sp>
-      <p:sp>
-        <p:nvSpPr>
-          <p:cNvPr id="12" name="Rectangle 11"/>
+              <a:t>Texto, herramientas, laboratorio o el mundo físico cambian el problema.</a:t>
+            </a:r>
+          </a:p>
+        </p:txBody>
+      </p:sp>
+      <p:sp>
+        <p:nvSpPr>
+          <p:cNvPr id="13" name="Rounded Rectangle 12"/>
           <p:cNvSpPr/>
           <p:nvPr/>
         </p:nvSpPr>
         <p:spPr>
           <a:xfrm>
-            <a:off x="0" y="6510528"/>
-            <a:ext cx="12191695" cy="347472"/>
-          </a:xfrm>
-          <a:prstGeom prst="rect">
-            <a:avLst/>
-          </a:prstGeom>
-          <a:solidFill>
-            <a:srgbClr val="0F2C59"/>
-          </a:solidFill>
-          <a:ln>
-            <a:noFill/>
-          </a:ln>
-        </p:spPr>
-        <p:style>
-          <a:lnRef idx="1">
-            <a:schemeClr val="accent1"/>
-          </a:lnRef>
-          <a:fillRef idx="3">
-            <a:schemeClr val="accent1"/>
-          </a:fillRef>
-          <a:effectRef idx="2">
-            <a:schemeClr val="accent1"/>
-          </a:effectRef>
-          <a:fontRef idx="minor">
-            <a:schemeClr val="lt1"/>
-          </a:fontRef>
-        </p:style>
-        <p:txBody>
-          <a:bodyPr rtlCol="0" anchor="ctr"/>
-          <a:lstStyle/>
-          <a:p>
-            <a:pPr algn="ctr"/>
-          </a:p>
-        </p:txBody>
-      </p:sp>
-      <p:sp>
-        <p:nvSpPr>
-          <p:cNvPr id="13" name="TextBox 12"/>
-          <p:cNvSpPr txBox="1"/>
-          <p:nvPr/>
-        </p:nvSpPr>
-        <p:spPr>
-          <a:xfrm>
-            <a:off x="457200" y="6528816"/>
-            <a:ext cx="9144000" cy="292608"/>
-          </a:xfrm>
-          <a:prstGeom prst="rect">
-            <a:avLst/>
-          </a:prstGeom>
-          <a:noFill/>
-        </p:spPr>
-        <p:txBody>
-          <a:bodyPr wrap="square">
-            <a:spAutoFit/>
-          </a:bodyPr>
-          <a:lstStyle/>
-          <a:p>
-            <a:pPr algn="l"/>
-            <a:r>
-              <a:rPr sz="1100" b="0" i="0">
-                <a:solidFill>
-                  <a:srgbClr val="FFFFFF"/>
-                </a:solidFill>
-                <a:latin typeface="Calibri"/>
-              </a:rPr>
-              <a:t>Curso de Inteligencia Artificial  ·  Estado del arte</a:t>
-            </a:r>
-          </a:p>
-        </p:txBody>
-      </p:sp>
-      <p:sp>
-        <p:nvSpPr>
-          <p:cNvPr id="14" name="TextBox 13"/>
-          <p:cNvSpPr txBox="1"/>
-          <p:nvPr/>
-        </p:nvSpPr>
-        <p:spPr>
-          <a:xfrm>
-            <a:off x="10728655" y="6528816"/>
-            <a:ext cx="1097280" cy="292608"/>
-          </a:xfrm>
-          <a:prstGeom prst="rect">
-            <a:avLst/>
-          </a:prstGeom>
-          <a:noFill/>
-        </p:spPr>
-        <p:txBody>
-          <a:bodyPr wrap="square">
-            <a:spAutoFit/>
-          </a:bodyPr>
-          <a:lstStyle/>
-          <a:p>
-            <a:pPr algn="r"/>
-            <a:r>
-              <a:rPr sz="1100" b="0" i="0">
-                <a:solidFill>
-                  <a:srgbClr val="FFFFFF"/>
-                </a:solidFill>
-                <a:latin typeface="Calibri"/>
-              </a:rPr>
-              <a:t>11 / 12</a:t>
-            </a:r>
-          </a:p>
-        </p:txBody>
-      </p:sp>
-    </p:spTree>
-  </p:cSld>
-  <p:clrMapOvr>
-    <a:masterClrMapping/>
-  </p:clrMapOvr>
-</p:sld>
-</file>
-
-<file path=ppt/slides/slide12.xml><?xml version="1.0" encoding="utf-8"?>
-<p:sld xmlns:a="http://schemas.openxmlformats.org/drawingml/2006/main" xmlns:p="http://schemas.openxmlformats.org/presentationml/2006/main" xmlns:r="http://schemas.openxmlformats.org/officeDocument/2006/relationships">
-  <p:cSld>
-    <p:spTree>
-      <p:nvGrpSpPr>
-        <p:cNvPr id="1" name=""/>
-        <p:cNvGrpSpPr/>
-        <p:nvPr/>
-      </p:nvGrpSpPr>
-      <p:grpSpPr/>
-      <p:sp>
-        <p:nvSpPr>
-          <p:cNvPr id="2" name="Rectangle 1"/>
-          <p:cNvSpPr/>
-          <p:nvPr/>
-        </p:nvSpPr>
-        <p:spPr>
-          <a:xfrm>
-            <a:off x="0" y="0"/>
-            <a:ext cx="12191695" cy="6858000"/>
-          </a:xfrm>
-          <a:prstGeom prst="rect">
-            <a:avLst/>
-          </a:prstGeom>
-          <a:solidFill>
-            <a:srgbClr val="FFFFFF"/>
-          </a:solidFill>
-          <a:ln>
-            <a:noFill/>
-          </a:ln>
-        </p:spPr>
-        <p:style>
-          <a:lnRef idx="1">
-            <a:schemeClr val="accent1"/>
-          </a:lnRef>
-          <a:fillRef idx="3">
-            <a:schemeClr val="accent1"/>
-          </a:fillRef>
-          <a:effectRef idx="2">
-            <a:schemeClr val="accent1"/>
-          </a:effectRef>
-          <a:fontRef idx="minor">
-            <a:schemeClr val="lt1"/>
-          </a:fontRef>
-        </p:style>
-        <p:txBody>
-          <a:bodyPr rtlCol="0" anchor="ctr"/>
-          <a:lstStyle/>
-          <a:p>
-            <a:pPr algn="ctr"/>
-          </a:p>
-        </p:txBody>
-      </p:sp>
-      <p:sp>
-        <p:nvSpPr>
-          <p:cNvPr id="3" name="Rectangle 2"/>
-          <p:cNvSpPr/>
-          <p:nvPr/>
-        </p:nvSpPr>
-        <p:spPr>
-          <a:xfrm>
-            <a:off x="0" y="0"/>
-            <a:ext cx="109728" cy="6858000"/>
-          </a:xfrm>
-          <a:prstGeom prst="rect">
-            <a:avLst/>
-          </a:prstGeom>
-          <a:solidFill>
-            <a:srgbClr val="E8B93A"/>
-          </a:solidFill>
-          <a:ln>
-            <a:noFill/>
-          </a:ln>
-        </p:spPr>
-        <p:style>
-          <a:lnRef idx="1">
-            <a:schemeClr val="accent1"/>
-          </a:lnRef>
-          <a:fillRef idx="3">
-            <a:schemeClr val="accent1"/>
-          </a:fillRef>
-          <a:effectRef idx="2">
-            <a:schemeClr val="accent1"/>
-          </a:effectRef>
-          <a:fontRef idx="minor">
-            <a:schemeClr val="lt1"/>
-          </a:fontRef>
-        </p:style>
-        <p:txBody>
-          <a:bodyPr rtlCol="0" anchor="ctr"/>
-          <a:lstStyle/>
-          <a:p>
-            <a:pPr algn="ctr"/>
-          </a:p>
-        </p:txBody>
-      </p:sp>
-      <p:sp>
-        <p:nvSpPr>
-          <p:cNvPr id="4" name="TextBox 3"/>
-          <p:cNvSpPr txBox="1"/>
-          <p:nvPr/>
-        </p:nvSpPr>
-        <p:spPr>
-          <a:xfrm>
-            <a:off x="502920" y="256032"/>
-            <a:ext cx="11155680" cy="502920"/>
-          </a:xfrm>
-          <a:prstGeom prst="rect">
-            <a:avLst/>
-          </a:prstGeom>
-          <a:noFill/>
-        </p:spPr>
-        <p:txBody>
-          <a:bodyPr wrap="square">
-            <a:spAutoFit/>
-          </a:bodyPr>
-          <a:lstStyle/>
-          <a:p>
-            <a:pPr algn="l"/>
-            <a:r>
-              <a:rPr sz="2800" b="1" i="0">
-                <a:solidFill>
-                  <a:srgbClr val="0F2C59"/>
-                </a:solidFill>
-                <a:latin typeface="Calibri"/>
-              </a:rPr>
-              <a:t>Para discutir</a:t>
-            </a:r>
-          </a:p>
-        </p:txBody>
-      </p:sp>
-      <p:sp>
-        <p:nvSpPr>
-          <p:cNvPr id="5" name="Rectangle 4"/>
-          <p:cNvSpPr/>
-          <p:nvPr/>
-        </p:nvSpPr>
-        <p:spPr>
-          <a:xfrm>
-            <a:off x="502920" y="804672"/>
-            <a:ext cx="1280160" cy="54864"/>
-          </a:xfrm>
-          <a:prstGeom prst="rect">
-            <a:avLst/>
-          </a:prstGeom>
-          <a:solidFill>
-            <a:srgbClr val="E8B93A"/>
-          </a:solidFill>
-          <a:ln>
-            <a:noFill/>
-          </a:ln>
-        </p:spPr>
-        <p:style>
-          <a:lnRef idx="1">
-            <a:schemeClr val="accent1"/>
-          </a:lnRef>
-          <a:fillRef idx="3">
-            <a:schemeClr val="accent1"/>
-          </a:fillRef>
-          <a:effectRef idx="2">
-            <a:schemeClr val="accent1"/>
-          </a:effectRef>
-          <a:fontRef idx="minor">
-            <a:schemeClr val="lt1"/>
-          </a:fontRef>
-        </p:style>
-        <p:txBody>
-          <a:bodyPr rtlCol="0" anchor="ctr"/>
-          <a:lstStyle/>
-          <a:p>
-            <a:pPr algn="ctr"/>
-          </a:p>
-        </p:txBody>
-      </p:sp>
-      <p:sp>
-        <p:nvSpPr>
-          <p:cNvPr id="6" name="TextBox 5"/>
-          <p:cNvSpPr txBox="1"/>
-          <p:nvPr/>
-        </p:nvSpPr>
-        <p:spPr>
-          <a:xfrm>
-            <a:off x="502920" y="932688"/>
-            <a:ext cx="11155680" cy="365760"/>
-          </a:xfrm>
-          <a:prstGeom prst="rect">
-            <a:avLst/>
-          </a:prstGeom>
-          <a:noFill/>
-        </p:spPr>
-        <p:txBody>
-          <a:bodyPr wrap="square">
-            <a:spAutoFit/>
-          </a:bodyPr>
-          <a:lstStyle/>
-          <a:p>
-            <a:pPr algn="l"/>
-            <a:r>
-              <a:rPr sz="1600" b="0" i="1">
-                <a:solidFill>
-                  <a:srgbClr val="5D6D7E"/>
-                </a:solidFill>
-                <a:latin typeface="Calibri"/>
-              </a:rPr>
-              <a:t>Preguntas que recorren el resto del curso</a:t>
-            </a:r>
-          </a:p>
-        </p:txBody>
-      </p:sp>
-      <p:sp>
-        <p:nvSpPr>
-          <p:cNvPr id="7" name="Rounded Rectangle 6"/>
-          <p:cNvSpPr/>
-          <p:nvPr/>
-        </p:nvSpPr>
-        <p:spPr>
-          <a:xfrm>
-            <a:off x="457200" y="1325880"/>
+            <a:off x="457200" y="3520440"/>
             <a:ext cx="5532120" cy="2011680"/>
           </a:xfrm>
           <a:prstGeom prst="roundRect">
@@ -4513,18 +4381,19 @@
           <a:lstStyle/>
           <a:p>
             <a:pPr algn="ctr"/>
-          </a:p>
-        </p:txBody>
-      </p:sp>
-      <p:sp>
-        <p:nvSpPr>
-          <p:cNvPr id="8" name="TextBox 7"/>
+            <a:endParaRPr/>
+          </a:p>
+        </p:txBody>
+      </p:sp>
+      <p:sp>
+        <p:nvSpPr>
+          <p:cNvPr id="14" name="TextBox 13"/>
           <p:cNvSpPr txBox="1"/>
           <p:nvPr/>
         </p:nvSpPr>
         <p:spPr>
           <a:xfrm>
-            <a:off x="658368" y="1490472"/>
+            <a:off x="658368" y="3685032"/>
             <a:ext cx="5166360" cy="365760"/>
           </a:xfrm>
           <a:prstGeom prst="rect">
@@ -4546,20 +4415,20 @@
                 </a:solidFill>
                 <a:latin typeface="Calibri"/>
               </a:rPr>
-              <a:t>¿Capacidad o apariencia?</a:t>
-            </a:r>
-          </a:p>
-        </p:txBody>
-      </p:sp>
-      <p:sp>
-        <p:nvSpPr>
-          <p:cNvPr id="9" name="TextBox 8"/>
+              <a:t>¿Quién controla la escala?</a:t>
+            </a:r>
+          </a:p>
+        </p:txBody>
+      </p:sp>
+      <p:sp>
+        <p:nvSpPr>
+          <p:cNvPr id="15" name="TextBox 14"/>
           <p:cNvSpPr txBox="1"/>
           <p:nvPr/>
         </p:nvSpPr>
         <p:spPr>
           <a:xfrm>
-            <a:off x="658368" y="1856232"/>
+            <a:off x="658368" y="4050792"/>
             <a:ext cx="5166360" cy="1325880"/>
           </a:xfrm>
           <a:prstGeom prst="rect">
@@ -4581,20 +4450,20 @@
                 </a:solidFill>
                 <a:latin typeface="Calibri"/>
               </a:rPr>
-              <a:t>Un sistema fluido ¿entiende, o solo predice patrones convincentes?</a:t>
-            </a:r>
-          </a:p>
-        </p:txBody>
-      </p:sp>
-      <p:sp>
-        <p:nvSpPr>
-          <p:cNvPr id="10" name="Rounded Rectangle 9"/>
+              <a:t>Datos, cómputo y gobernanza definen qué sistemas existen y para quién.</a:t>
+            </a:r>
+          </a:p>
+        </p:txBody>
+      </p:sp>
+      <p:sp>
+        <p:nvSpPr>
+          <p:cNvPr id="16" name="Rounded Rectangle 15"/>
           <p:cNvSpPr/>
           <p:nvPr/>
         </p:nvSpPr>
         <p:spPr>
           <a:xfrm>
-            <a:off x="6263640" y="1325880"/>
+            <a:off x="6263640" y="3520440"/>
             <a:ext cx="5532120" cy="2011680"/>
           </a:xfrm>
           <a:prstGeom prst="roundRect">
@@ -4630,240 +4499,7 @@
           <a:lstStyle/>
           <a:p>
             <a:pPr algn="ctr"/>
-          </a:p>
-        </p:txBody>
-      </p:sp>
-      <p:sp>
-        <p:nvSpPr>
-          <p:cNvPr id="11" name="TextBox 10"/>
-          <p:cNvSpPr txBox="1"/>
-          <p:nvPr/>
-        </p:nvSpPr>
-        <p:spPr>
-          <a:xfrm>
-            <a:off x="6464808" y="1490472"/>
-            <a:ext cx="5166360" cy="365760"/>
-          </a:xfrm>
-          <a:prstGeom prst="rect">
-            <a:avLst/>
-          </a:prstGeom>
-          <a:noFill/>
-        </p:spPr>
-        <p:txBody>
-          <a:bodyPr wrap="square">
-            <a:spAutoFit/>
-          </a:bodyPr>
-          <a:lstStyle/>
-          <a:p>
-            <a:pPr algn="l"/>
-            <a:r>
-              <a:rPr sz="1600" b="1" i="0">
-                <a:solidFill>
-                  <a:srgbClr val="0F2C59"/>
-                </a:solidFill>
-                <a:latin typeface="Calibri"/>
-              </a:rPr>
-              <a:t>¿Dónde actúa la IA?</a:t>
-            </a:r>
-          </a:p>
-        </p:txBody>
-      </p:sp>
-      <p:sp>
-        <p:nvSpPr>
-          <p:cNvPr id="12" name="TextBox 11"/>
-          <p:cNvSpPr txBox="1"/>
-          <p:nvPr/>
-        </p:nvSpPr>
-        <p:spPr>
-          <a:xfrm>
-            <a:off x="6464808" y="1856232"/>
-            <a:ext cx="5166360" cy="1325880"/>
-          </a:xfrm>
-          <a:prstGeom prst="rect">
-            <a:avLst/>
-          </a:prstGeom>
-          <a:noFill/>
-        </p:spPr>
-        <p:txBody>
-          <a:bodyPr wrap="square">
-            <a:spAutoFit/>
-          </a:bodyPr>
-          <a:lstStyle/>
-          <a:p>
-            <a:pPr algn="l"/>
-            <a:r>
-              <a:rPr sz="1400" b="0" i="0">
-                <a:solidFill>
-                  <a:srgbClr val="2C3E50"/>
-                </a:solidFill>
-                <a:latin typeface="Calibri"/>
-              </a:rPr>
-              <a:t>Texto, herramientas, laboratorio o el mundo físico cambian el problema.</a:t>
-            </a:r>
-          </a:p>
-        </p:txBody>
-      </p:sp>
-      <p:sp>
-        <p:nvSpPr>
-          <p:cNvPr id="13" name="Rounded Rectangle 12"/>
-          <p:cNvSpPr/>
-          <p:nvPr/>
-        </p:nvSpPr>
-        <p:spPr>
-          <a:xfrm>
-            <a:off x="457200" y="3520440"/>
-            <a:ext cx="5532120" cy="2011680"/>
-          </a:xfrm>
-          <a:prstGeom prst="roundRect">
-            <a:avLst>
-              <a:gd name="adj" fmla="val 8000"/>
-            </a:avLst>
-          </a:prstGeom>
-          <a:solidFill>
-            <a:srgbClr val="F6F8FB"/>
-          </a:solidFill>
-          <a:ln>
-            <a:solidFill>
-              <a:srgbClr val="D5DEE8"/>
-            </a:solidFill>
-          </a:ln>
-        </p:spPr>
-        <p:style>
-          <a:lnRef idx="1">
-            <a:schemeClr val="accent1"/>
-          </a:lnRef>
-          <a:fillRef idx="3">
-            <a:schemeClr val="accent1"/>
-          </a:fillRef>
-          <a:effectRef idx="2">
-            <a:schemeClr val="accent1"/>
-          </a:effectRef>
-          <a:fontRef idx="minor">
-            <a:schemeClr val="lt1"/>
-          </a:fontRef>
-        </p:style>
-        <p:txBody>
-          <a:bodyPr rtlCol="0" anchor="ctr"/>
-          <a:lstStyle/>
-          <a:p>
-            <a:pPr algn="ctr"/>
-          </a:p>
-        </p:txBody>
-      </p:sp>
-      <p:sp>
-        <p:nvSpPr>
-          <p:cNvPr id="14" name="TextBox 13"/>
-          <p:cNvSpPr txBox="1"/>
-          <p:nvPr/>
-        </p:nvSpPr>
-        <p:spPr>
-          <a:xfrm>
-            <a:off x="658368" y="3685032"/>
-            <a:ext cx="5166360" cy="365760"/>
-          </a:xfrm>
-          <a:prstGeom prst="rect">
-            <a:avLst/>
-          </a:prstGeom>
-          <a:noFill/>
-        </p:spPr>
-        <p:txBody>
-          <a:bodyPr wrap="square">
-            <a:spAutoFit/>
-          </a:bodyPr>
-          <a:lstStyle/>
-          <a:p>
-            <a:pPr algn="l"/>
-            <a:r>
-              <a:rPr sz="1600" b="1" i="0">
-                <a:solidFill>
-                  <a:srgbClr val="0F2C59"/>
-                </a:solidFill>
-                <a:latin typeface="Calibri"/>
-              </a:rPr>
-              <a:t>¿Quién controla la escala?</a:t>
-            </a:r>
-          </a:p>
-        </p:txBody>
-      </p:sp>
-      <p:sp>
-        <p:nvSpPr>
-          <p:cNvPr id="15" name="TextBox 14"/>
-          <p:cNvSpPr txBox="1"/>
-          <p:nvPr/>
-        </p:nvSpPr>
-        <p:spPr>
-          <a:xfrm>
-            <a:off x="658368" y="4050792"/>
-            <a:ext cx="5166360" cy="1325880"/>
-          </a:xfrm>
-          <a:prstGeom prst="rect">
-            <a:avLst/>
-          </a:prstGeom>
-          <a:noFill/>
-        </p:spPr>
-        <p:txBody>
-          <a:bodyPr wrap="square">
-            <a:spAutoFit/>
-          </a:bodyPr>
-          <a:lstStyle/>
-          <a:p>
-            <a:pPr algn="l"/>
-            <a:r>
-              <a:rPr sz="1400" b="0" i="0">
-                <a:solidFill>
-                  <a:srgbClr val="2C3E50"/>
-                </a:solidFill>
-                <a:latin typeface="Calibri"/>
-              </a:rPr>
-              <a:t>Datos, cómputo y gobernanza definen qué sistemas existen y para quién.</a:t>
-            </a:r>
-          </a:p>
-        </p:txBody>
-      </p:sp>
-      <p:sp>
-        <p:nvSpPr>
-          <p:cNvPr id="16" name="Rounded Rectangle 15"/>
-          <p:cNvSpPr/>
-          <p:nvPr/>
-        </p:nvSpPr>
-        <p:spPr>
-          <a:xfrm>
-            <a:off x="6263640" y="3520440"/>
-            <a:ext cx="5532120" cy="2011680"/>
-          </a:xfrm>
-          <a:prstGeom prst="roundRect">
-            <a:avLst>
-              <a:gd name="adj" fmla="val 8000"/>
-            </a:avLst>
-          </a:prstGeom>
-          <a:solidFill>
-            <a:srgbClr val="F6F8FB"/>
-          </a:solidFill>
-          <a:ln>
-            <a:solidFill>
-              <a:srgbClr val="D5DEE8"/>
-            </a:solidFill>
-          </a:ln>
-        </p:spPr>
-        <p:style>
-          <a:lnRef idx="1">
-            <a:schemeClr val="accent1"/>
-          </a:lnRef>
-          <a:fillRef idx="3">
-            <a:schemeClr val="accent1"/>
-          </a:fillRef>
-          <a:effectRef idx="2">
-            <a:schemeClr val="accent1"/>
-          </a:effectRef>
-          <a:fontRef idx="minor">
-            <a:schemeClr val="lt1"/>
-          </a:fontRef>
-        </p:style>
-        <p:txBody>
-          <a:bodyPr rtlCol="0" anchor="ctr"/>
-          <a:lstStyle/>
-          <a:p>
-            <a:pPr algn="ctr"/>
+            <a:endParaRPr/>
           </a:p>
         </p:txBody>
       </p:sp>
@@ -4977,6 +4613,7 @@
           <a:lstStyle/>
           <a:p>
             <a:pPr algn="ctr"/>
+            <a:endParaRPr/>
           </a:p>
         </p:txBody>
       </p:sp>
@@ -5059,7 +4696,7 @@
 </file>
 
 <file path=ppt/slides/slide2.xml><?xml version="1.0" encoding="utf-8"?>
-<p:sld xmlns:a="http://schemas.openxmlformats.org/drawingml/2006/main" xmlns:p="http://schemas.openxmlformats.org/presentationml/2006/main" xmlns:r="http://schemas.openxmlformats.org/officeDocument/2006/relationships">
+<p:sld xmlns:a="http://schemas.openxmlformats.org/drawingml/2006/main" xmlns:r="http://schemas.openxmlformats.org/officeDocument/2006/relationships" xmlns:p="http://schemas.openxmlformats.org/presentationml/2006/main">
   <p:cSld>
     <p:spTree>
       <p:nvGrpSpPr>
@@ -5067,7 +4704,14 @@
         <p:cNvGrpSpPr/>
         <p:nvPr/>
       </p:nvGrpSpPr>
-      <p:grpSpPr/>
+      <p:grpSpPr>
+        <a:xfrm>
+          <a:off x="0" y="0"/>
+          <a:ext cx="0" cy="0"/>
+          <a:chOff x="0" y="0"/>
+          <a:chExt cx="0" cy="0"/>
+        </a:xfrm>
+      </p:grpSpPr>
       <p:sp>
         <p:nvSpPr>
           <p:cNvPr id="2" name="Rectangle 1"/>
@@ -5108,6 +4752,7 @@
           <a:lstStyle/>
           <a:p>
             <a:pPr algn="ctr"/>
+            <a:endParaRPr/>
           </a:p>
         </p:txBody>
       </p:sp>
@@ -5151,6 +4796,7 @@
           <a:lstStyle/>
           <a:p>
             <a:pPr algn="ctr"/>
+            <a:endParaRPr/>
           </a:p>
         </p:txBody>
       </p:sp>
@@ -5229,6 +4875,7 @@
           <a:lstStyle/>
           <a:p>
             <a:pPr algn="ctr"/>
+            <a:endParaRPr/>
           </a:p>
         </p:txBody>
       </p:sp>
@@ -5276,6 +4923,7 @@
           <a:lstStyle/>
           <a:p>
             <a:pPr algn="ctr"/>
+            <a:endParaRPr/>
           </a:p>
         </p:txBody>
       </p:sp>
@@ -5428,6 +5076,7 @@
           <a:lstStyle/>
           <a:p>
             <a:pPr algn="ctr"/>
+            <a:endParaRPr/>
           </a:p>
         </p:txBody>
       </p:sp>
@@ -5580,6 +5229,7 @@
           <a:lstStyle/>
           <a:p>
             <a:pPr algn="ctr"/>
+            <a:endParaRPr/>
           </a:p>
         </p:txBody>
       </p:sp>
@@ -5732,6 +5382,7 @@
           <a:lstStyle/>
           <a:p>
             <a:pPr algn="ctr"/>
+            <a:endParaRPr/>
           </a:p>
         </p:txBody>
       </p:sp>
@@ -5884,6 +5535,7 @@
           <a:lstStyle/>
           <a:p>
             <a:pPr algn="ctr"/>
+            <a:endParaRPr/>
           </a:p>
         </p:txBody>
       </p:sp>
@@ -6036,6 +5688,7 @@
           <a:lstStyle/>
           <a:p>
             <a:pPr algn="ctr"/>
+            <a:endParaRPr/>
           </a:p>
         </p:txBody>
       </p:sp>
@@ -6184,6 +5837,7 @@
           <a:lstStyle/>
           <a:p>
             <a:pPr algn="ctr"/>
+            <a:endParaRPr/>
           </a:p>
         </p:txBody>
       </p:sp>
@@ -6266,7 +5920,7 @@
 </file>
 
 <file path=ppt/slides/slide3.xml><?xml version="1.0" encoding="utf-8"?>
-<p:sld xmlns:a="http://schemas.openxmlformats.org/drawingml/2006/main" xmlns:p="http://schemas.openxmlformats.org/presentationml/2006/main" xmlns:r="http://schemas.openxmlformats.org/officeDocument/2006/relationships">
+<p:sld xmlns:a="http://schemas.openxmlformats.org/drawingml/2006/main" xmlns:r="http://schemas.openxmlformats.org/officeDocument/2006/relationships" xmlns:p="http://schemas.openxmlformats.org/presentationml/2006/main">
   <p:cSld>
     <p:spTree>
       <p:nvGrpSpPr>
@@ -6274,7 +5928,14 @@
         <p:cNvGrpSpPr/>
         <p:nvPr/>
       </p:nvGrpSpPr>
-      <p:grpSpPr/>
+      <p:grpSpPr>
+        <a:xfrm>
+          <a:off x="0" y="0"/>
+          <a:ext cx="0" cy="0"/>
+          <a:chOff x="0" y="0"/>
+          <a:chExt cx="0" cy="0"/>
+        </a:xfrm>
+      </p:grpSpPr>
       <p:sp>
         <p:nvSpPr>
           <p:cNvPr id="2" name="Rectangle 1"/>
@@ -6315,6 +5976,7 @@
           <a:lstStyle/>
           <a:p>
             <a:pPr algn="ctr"/>
+            <a:endParaRPr/>
           </a:p>
         </p:txBody>
       </p:sp>
@@ -6358,6 +6020,7 @@
           <a:lstStyle/>
           <a:p>
             <a:pPr algn="ctr"/>
+            <a:endParaRPr/>
           </a:p>
         </p:txBody>
       </p:sp>
@@ -6436,6 +6099,7 @@
           <a:lstStyle/>
           <a:p>
             <a:pPr algn="ctr"/>
+            <a:endParaRPr/>
           </a:p>
         </p:txBody>
       </p:sp>
@@ -6518,6 +6182,7 @@
           <a:lstStyle/>
           <a:p>
             <a:pPr algn="ctr"/>
+            <a:endParaRPr/>
           </a:p>
         </p:txBody>
       </p:sp>
@@ -6636,6 +6301,7 @@
           <a:lstStyle/>
           <a:p>
             <a:pPr algn="ctr"/>
+            <a:endParaRPr/>
           </a:p>
         </p:txBody>
       </p:sp>
@@ -6750,6 +6416,7 @@
           <a:lstStyle/>
           <a:p>
             <a:pPr algn="ctr"/>
+            <a:endParaRPr/>
           </a:p>
         </p:txBody>
       </p:sp>
@@ -6832,7 +6499,7 @@
 </file>
 
 <file path=ppt/slides/slide4.xml><?xml version="1.0" encoding="utf-8"?>
-<p:sld xmlns:a="http://schemas.openxmlformats.org/drawingml/2006/main" xmlns:p="http://schemas.openxmlformats.org/presentationml/2006/main" xmlns:r="http://schemas.openxmlformats.org/officeDocument/2006/relationships">
+<p:sld xmlns:a="http://schemas.openxmlformats.org/drawingml/2006/main" xmlns:r="http://schemas.openxmlformats.org/officeDocument/2006/relationships" xmlns:p="http://schemas.openxmlformats.org/presentationml/2006/main">
   <p:cSld>
     <p:spTree>
       <p:nvGrpSpPr>
@@ -6840,7 +6507,14 @@
         <p:cNvGrpSpPr/>
         <p:nvPr/>
       </p:nvGrpSpPr>
-      <p:grpSpPr/>
+      <p:grpSpPr>
+        <a:xfrm>
+          <a:off x="0" y="0"/>
+          <a:ext cx="0" cy="0"/>
+          <a:chOff x="0" y="0"/>
+          <a:chExt cx="0" cy="0"/>
+        </a:xfrm>
+      </p:grpSpPr>
       <p:sp>
         <p:nvSpPr>
           <p:cNvPr id="2" name="Rectangle 1"/>
@@ -6881,6 +6555,7 @@
           <a:lstStyle/>
           <a:p>
             <a:pPr algn="ctr"/>
+            <a:endParaRPr/>
           </a:p>
         </p:txBody>
       </p:sp>
@@ -6924,6 +6599,7 @@
           <a:lstStyle/>
           <a:p>
             <a:pPr algn="ctr"/>
+            <a:endParaRPr/>
           </a:p>
         </p:txBody>
       </p:sp>
@@ -6957,7 +6633,7 @@
                 </a:solidFill>
                 <a:latin typeface="Calibri"/>
               </a:rPr>
-              <a:t>Razonamiento explícito</a:t>
+              <a:t>Multimodalidad y generación de medios</a:t>
             </a:r>
           </a:p>
         </p:txBody>
@@ -7002,19 +6678,68 @@
           <a:lstStyle/>
           <a:p>
             <a:pPr algn="ctr"/>
-          </a:p>
-        </p:txBody>
-      </p:sp>
-      <p:sp>
-        <p:nvSpPr>
-          <p:cNvPr id="6" name="TextBox 5"/>
+            <a:endParaRPr/>
+          </a:p>
+        </p:txBody>
+      </p:sp>
+      <p:sp>
+        <p:nvSpPr>
+          <p:cNvPr id="6" name="Rounded Rectangle 5"/>
+          <p:cNvSpPr/>
+          <p:nvPr/>
+        </p:nvSpPr>
+        <p:spPr>
+          <a:xfrm>
+            <a:off x="457200" y="1371600"/>
+            <a:ext cx="5486400" cy="4480560"/>
+          </a:xfrm>
+          <a:prstGeom prst="roundRect">
+            <a:avLst>
+              <a:gd name="adj" fmla="val 8000"/>
+            </a:avLst>
+          </a:prstGeom>
+          <a:solidFill>
+            <a:srgbClr val="F6F8FB"/>
+          </a:solidFill>
+          <a:ln>
+            <a:solidFill>
+              <a:srgbClr val="D5DEE8"/>
+            </a:solidFill>
+          </a:ln>
+        </p:spPr>
+        <p:style>
+          <a:lnRef idx="1">
+            <a:schemeClr val="accent1"/>
+          </a:lnRef>
+          <a:fillRef idx="3">
+            <a:schemeClr val="accent1"/>
+          </a:fillRef>
+          <a:effectRef idx="2">
+            <a:schemeClr val="accent1"/>
+          </a:effectRef>
+          <a:fontRef idx="minor">
+            <a:schemeClr val="lt1"/>
+          </a:fontRef>
+        </p:style>
+        <p:txBody>
+          <a:bodyPr rtlCol="0" anchor="ctr"/>
+          <a:lstStyle/>
+          <a:p>
+            <a:pPr algn="ctr"/>
+            <a:endParaRPr/>
+          </a:p>
+        </p:txBody>
+      </p:sp>
+      <p:sp>
+        <p:nvSpPr>
+          <p:cNvPr id="7" name="TextBox 6"/>
           <p:cNvSpPr txBox="1"/>
           <p:nvPr/>
         </p:nvSpPr>
         <p:spPr>
           <a:xfrm>
-            <a:off x="502920" y="932688"/>
-            <a:ext cx="11155680" cy="365760"/>
+            <a:off x="658368" y="1536192"/>
+            <a:ext cx="5120640" cy="365760"/>
           </a:xfrm>
           <a:prstGeom prst="rect">
             <a:avLst/>
@@ -7029,27 +6754,27 @@
           <a:p>
             <a:pPr algn="l"/>
             <a:r>
-              <a:rPr sz="1600" b="0" i="1">
-                <a:solidFill>
-                  <a:srgbClr val="5D6D7E"/>
+              <a:rPr sz="1600" b="1" i="0">
+                <a:solidFill>
+                  <a:srgbClr val="0F2C59"/>
                 </a:solidFill>
                 <a:latin typeface="Calibri"/>
               </a:rPr>
-              <a:t>Más cómputo en inferencia, no solo más parámetros</a:t>
-            </a:r>
-          </a:p>
-        </p:txBody>
-      </p:sp>
-      <p:sp>
-        <p:nvSpPr>
-          <p:cNvPr id="7" name="TextBox 6"/>
+              <a:t>IA multimodal</a:t>
+            </a:r>
+          </a:p>
+        </p:txBody>
+      </p:sp>
+      <p:sp>
+        <p:nvSpPr>
+          <p:cNvPr id="8" name="TextBox 7"/>
           <p:cNvSpPr txBox="1"/>
           <p:nvPr/>
         </p:nvSpPr>
         <p:spPr>
           <a:xfrm>
-            <a:off x="640080" y="1325880"/>
-            <a:ext cx="10972800" cy="5029200"/>
+            <a:off x="658368" y="1901952"/>
+            <a:ext cx="5120640" cy="3794760"/>
           </a:xfrm>
           <a:prstGeom prst="rect">
             <a:avLst/>
@@ -7062,86 +6787,142 @@
           </a:bodyPr>
           <a:lstStyle/>
           <a:p>
-            <a:pPr algn="l">
-              <a:lnSpc>
-                <a:spcPct val="115000"/>
-              </a:lnSpc>
-              <a:spcAft>
-                <a:spcPts val="1400"/>
-              </a:spcAft>
-            </a:pPr>
-            <a:r>
-              <a:rPr sz="2000" b="0" i="0">
+            <a:pPr algn="l"/>
+            <a:r>
+              <a:rPr sz="1400" b="0" i="0">
                 <a:solidFill>
                   <a:srgbClr val="2C3E50"/>
                 </a:solidFill>
                 <a:latin typeface="Calibri"/>
               </a:rPr>
-              <a:t>•  Cadenas de pensamiento, modelos “de razonamiento” y búsqueda en tiempo de inferencia.</a:t>
-            </a:r>
-          </a:p>
-          <a:p>
-            <a:pPr algn="l">
-              <a:lnSpc>
-                <a:spcPct val="115000"/>
-              </a:lnSpc>
-              <a:spcAft>
-                <a:spcPts val="1400"/>
-              </a:spcAft>
-            </a:pPr>
-            <a:r>
-              <a:rPr sz="2000" b="0" i="0">
-                <a:solidFill>
-                  <a:srgbClr val="2C3E50"/>
+              <a:t>Une texto, imagen, audio y video en un mismo modelo.
+Habilita descripción de escenas, transcripción, generación de medios y asistentes que “ven” y “escuchan”.</a:t>
+            </a:r>
+          </a:p>
+        </p:txBody>
+      </p:sp>
+      <p:sp>
+        <p:nvSpPr>
+          <p:cNvPr id="9" name="Rounded Rectangle 8"/>
+          <p:cNvSpPr/>
+          <p:nvPr/>
+        </p:nvSpPr>
+        <p:spPr>
+          <a:xfrm>
+            <a:off x="6172200" y="1371600"/>
+            <a:ext cx="5486400" cy="4480560"/>
+          </a:xfrm>
+          <a:prstGeom prst="roundRect">
+            <a:avLst>
+              <a:gd name="adj" fmla="val 8000"/>
+            </a:avLst>
+          </a:prstGeom>
+          <a:solidFill>
+            <a:srgbClr val="F6F8FB"/>
+          </a:solidFill>
+          <a:ln>
+            <a:solidFill>
+              <a:srgbClr val="D5DEE8"/>
+            </a:solidFill>
+          </a:ln>
+        </p:spPr>
+        <p:style>
+          <a:lnRef idx="1">
+            <a:schemeClr val="accent1"/>
+          </a:lnRef>
+          <a:fillRef idx="3">
+            <a:schemeClr val="accent1"/>
+          </a:fillRef>
+          <a:effectRef idx="2">
+            <a:schemeClr val="accent1"/>
+          </a:effectRef>
+          <a:fontRef idx="minor">
+            <a:schemeClr val="lt1"/>
+          </a:fontRef>
+        </p:style>
+        <p:txBody>
+          <a:bodyPr rtlCol="0" anchor="ctr"/>
+          <a:lstStyle/>
+          <a:p>
+            <a:pPr algn="ctr"/>
+            <a:endParaRPr/>
+          </a:p>
+        </p:txBody>
+      </p:sp>
+      <p:sp>
+        <p:nvSpPr>
+          <p:cNvPr id="10" name="TextBox 9"/>
+          <p:cNvSpPr txBox="1"/>
+          <p:nvPr/>
+        </p:nvSpPr>
+        <p:spPr>
+          <a:xfrm>
+            <a:off x="6373368" y="1536192"/>
+            <a:ext cx="5120640" cy="365760"/>
+          </a:xfrm>
+          <a:prstGeom prst="rect">
+            <a:avLst/>
+          </a:prstGeom>
+          <a:noFill/>
+        </p:spPr>
+        <p:txBody>
+          <a:bodyPr wrap="square">
+            <a:spAutoFit/>
+          </a:bodyPr>
+          <a:lstStyle/>
+          <a:p>
+            <a:pPr algn="l"/>
+            <a:r>
+              <a:rPr sz="1600" b="1" i="0">
+                <a:solidFill>
+                  <a:srgbClr val="0F2C59"/>
                 </a:solidFill>
                 <a:latin typeface="Calibri"/>
               </a:rPr>
-              <a:t>•  Mejoran matemáticas, lógica y planificación respecto a responder en un solo paso.</a:t>
-            </a:r>
-          </a:p>
-          <a:p>
-            <a:pPr algn="l">
-              <a:lnSpc>
-                <a:spcPct val="115000"/>
-              </a:lnSpc>
-              <a:spcAft>
-                <a:spcPts val="1400"/>
-              </a:spcAft>
-            </a:pPr>
-            <a:r>
-              <a:rPr sz="2000" b="0" i="0">
+              <a:t>Sistemas generativos</a:t>
+            </a:r>
+          </a:p>
+        </p:txBody>
+      </p:sp>
+      <p:sp>
+        <p:nvSpPr>
+          <p:cNvPr id="11" name="TextBox 10"/>
+          <p:cNvSpPr txBox="1"/>
+          <p:nvPr/>
+        </p:nvSpPr>
+        <p:spPr>
+          <a:xfrm>
+            <a:off x="6373368" y="1901952"/>
+            <a:ext cx="5120640" cy="3794760"/>
+          </a:xfrm>
+          <a:prstGeom prst="rect">
+            <a:avLst/>
+          </a:prstGeom>
+          <a:noFill/>
+        </p:spPr>
+        <p:txBody>
+          <a:bodyPr wrap="square">
+            <a:spAutoFit/>
+          </a:bodyPr>
+          <a:lstStyle/>
+          <a:p>
+            <a:pPr algn="l"/>
+            <a:r>
+              <a:rPr sz="1400" b="0" i="0">
                 <a:solidFill>
                   <a:srgbClr val="2C3E50"/>
                 </a:solidFill>
                 <a:latin typeface="Calibri"/>
               </a:rPr>
-              <a:t>•  El costo se desplaza: cada consulta puede exigir más tiempo y energía.</a:t>
-            </a:r>
-          </a:p>
-          <a:p>
-            <a:pPr algn="l">
-              <a:lnSpc>
-                <a:spcPct val="115000"/>
-              </a:lnSpc>
-              <a:spcAft>
-                <a:spcPts val="1400"/>
-              </a:spcAft>
-            </a:pPr>
-            <a:r>
-              <a:rPr sz="2000" b="0" i="0">
-                <a:solidFill>
-                  <a:srgbClr val="2C3E50"/>
-                </a:solidFill>
-                <a:latin typeface="Calibri"/>
-              </a:rPr>
-              <a:t>•  Implicación para el curso: inteligencia no es solo predecir el siguiente token, sino cómo se busca una solución.</a:t>
-            </a:r>
-          </a:p>
-        </p:txBody>
-      </p:sp>
-      <p:sp>
-        <p:nvSpPr>
-          <p:cNvPr id="8" name="Rectangle 7"/>
+              <a:t>Difusión y variantes producen imagen, audio y video de alta fidelidad.
+Ya están integrados en herramientas creativas, de diseño y de producción, con debates sobre autoría y uso de datos.</a:t>
+            </a:r>
+          </a:p>
+        </p:txBody>
+      </p:sp>
+      <p:sp>
+        <p:nvSpPr>
+          <p:cNvPr id="12" name="Rectangle 11"/>
           <p:cNvSpPr/>
           <p:nvPr/>
         </p:nvSpPr>
@@ -7179,12 +6960,13 @@
           <a:lstStyle/>
           <a:p>
             <a:pPr algn="ctr"/>
-          </a:p>
-        </p:txBody>
-      </p:sp>
-      <p:sp>
-        <p:nvSpPr>
-          <p:cNvPr id="9" name="TextBox 8"/>
+            <a:endParaRPr/>
+          </a:p>
+        </p:txBody>
+      </p:sp>
+      <p:sp>
+        <p:nvSpPr>
+          <p:cNvPr id="13" name="TextBox 12"/>
           <p:cNvSpPr txBox="1"/>
           <p:nvPr/>
         </p:nvSpPr>
@@ -7219,7 +7001,7 @@
       </p:sp>
       <p:sp>
         <p:nvSpPr>
-          <p:cNvPr id="10" name="TextBox 9"/>
+          <p:cNvPr id="14" name="TextBox 13"/>
           <p:cNvSpPr txBox="1"/>
           <p:nvPr/>
         </p:nvSpPr>
@@ -7247,7 +7029,7 @@
                 </a:solidFill>
                 <a:latin typeface="Calibri"/>
               </a:rPr>
-              <a:t>4 / 12</a:t>
+              <a:t>5 / 12</a:t>
             </a:r>
           </a:p>
         </p:txBody>
@@ -7261,7 +7043,7 @@
 </file>
 
 <file path=ppt/slides/slide5.xml><?xml version="1.0" encoding="utf-8"?>
-<p:sld xmlns:a="http://schemas.openxmlformats.org/drawingml/2006/main" xmlns:p="http://schemas.openxmlformats.org/presentationml/2006/main" xmlns:r="http://schemas.openxmlformats.org/officeDocument/2006/relationships">
+<p:sld xmlns:a="http://schemas.openxmlformats.org/drawingml/2006/main" xmlns:r="http://schemas.openxmlformats.org/officeDocument/2006/relationships" xmlns:p="http://schemas.openxmlformats.org/presentationml/2006/main">
   <p:cSld>
     <p:spTree>
       <p:nvGrpSpPr>
@@ -7269,7 +7051,14 @@
         <p:cNvGrpSpPr/>
         <p:nvPr/>
       </p:nvGrpSpPr>
-      <p:grpSpPr/>
+      <p:grpSpPr>
+        <a:xfrm>
+          <a:off x="0" y="0"/>
+          <a:ext cx="0" cy="0"/>
+          <a:chOff x="0" y="0"/>
+          <a:chExt cx="0" cy="0"/>
+        </a:xfrm>
+      </p:grpSpPr>
       <p:sp>
         <p:nvSpPr>
           <p:cNvPr id="2" name="Rectangle 1"/>
@@ -7310,6 +7099,7 @@
           <a:lstStyle/>
           <a:p>
             <a:pPr algn="ctr"/>
+            <a:endParaRPr/>
           </a:p>
         </p:txBody>
       </p:sp>
@@ -7353,6 +7143,7 @@
           <a:lstStyle/>
           <a:p>
             <a:pPr algn="ctr"/>
+            <a:endParaRPr/>
           </a:p>
         </p:txBody>
       </p:sp>
@@ -7386,7 +7177,7 @@
                 </a:solidFill>
                 <a:latin typeface="Calibri"/>
               </a:rPr>
-              <a:t>Multimodalidad y generación de medios</a:t>
+              <a:t>Agentes, herramientas y RAG</a:t>
             </a:r>
           </a:p>
         </p:txBody>
@@ -7431,12 +7222,48 @@
           <a:lstStyle/>
           <a:p>
             <a:pPr algn="ctr"/>
-          </a:p>
-        </p:txBody>
-      </p:sp>
-      <p:sp>
-        <p:nvSpPr>
-          <p:cNvPr id="6" name="Rounded Rectangle 5"/>
+            <a:endParaRPr/>
+          </a:p>
+        </p:txBody>
+      </p:sp>
+      <p:sp>
+        <p:nvSpPr>
+          <p:cNvPr id="6" name="TextBox 5"/>
+          <p:cNvSpPr txBox="1"/>
+          <p:nvPr/>
+        </p:nvSpPr>
+        <p:spPr>
+          <a:xfrm>
+            <a:off x="502920" y="932688"/>
+            <a:ext cx="11155680" cy="365760"/>
+          </a:xfrm>
+          <a:prstGeom prst="rect">
+            <a:avLst/>
+          </a:prstGeom>
+          <a:noFill/>
+        </p:spPr>
+        <p:txBody>
+          <a:bodyPr wrap="square">
+            <a:spAutoFit/>
+          </a:bodyPr>
+          <a:lstStyle/>
+          <a:p>
+            <a:pPr algn="l"/>
+            <a:r>
+              <a:rPr sz="1600" b="0" i="1">
+                <a:solidFill>
+                  <a:srgbClr val="5D6D7E"/>
+                </a:solidFill>
+                <a:latin typeface="Calibri"/>
+              </a:rPr>
+              <a:t>De generar texto a ejecutar tareas</a:t>
+            </a:r>
+          </a:p>
+        </p:txBody>
+      </p:sp>
+      <p:sp>
+        <p:nvSpPr>
+          <p:cNvPr id="7" name="Rounded Rectangle 6"/>
           <p:cNvSpPr/>
           <p:nvPr/>
         </p:nvSpPr>
@@ -7478,12 +7305,13 @@
           <a:lstStyle/>
           <a:p>
             <a:pPr algn="ctr"/>
-          </a:p>
-        </p:txBody>
-      </p:sp>
-      <p:sp>
-        <p:nvSpPr>
-          <p:cNvPr id="7" name="TextBox 6"/>
+            <a:endParaRPr/>
+          </a:p>
+        </p:txBody>
+      </p:sp>
+      <p:sp>
+        <p:nvSpPr>
+          <p:cNvPr id="8" name="TextBox 7"/>
           <p:cNvSpPr txBox="1"/>
           <p:nvPr/>
         </p:nvSpPr>
@@ -7511,14 +7339,14 @@
                 </a:solidFill>
                 <a:latin typeface="Calibri"/>
               </a:rPr>
-              <a:t>IA multimodal</a:t>
-            </a:r>
-          </a:p>
-        </p:txBody>
-      </p:sp>
-      <p:sp>
-        <p:nvSpPr>
-          <p:cNvPr id="8" name="TextBox 7"/>
+              <a:t>Agentes de IA</a:t>
+            </a:r>
+          </a:p>
+        </p:txBody>
+      </p:sp>
+      <p:sp>
+        <p:nvSpPr>
+          <p:cNvPr id="9" name="TextBox 8"/>
           <p:cNvSpPr txBox="1"/>
           <p:nvPr/>
         </p:nvSpPr>
@@ -7546,15 +7374,15 @@
                 </a:solidFill>
                 <a:latin typeface="Calibri"/>
               </a:rPr>
-              <a:t>Une texto, imagen, audio y video en un mismo modelo.
-Habilita descripción de escenas, transcripción, generación de medios y asistentes que “ven” y “escuchan”.</a:t>
-            </a:r>
-          </a:p>
-        </p:txBody>
-      </p:sp>
-      <p:sp>
-        <p:nvSpPr>
-          <p:cNvPr id="9" name="Rounded Rectangle 8"/>
+              <a:t>Combinan un modelo con herramientas: navegador, código, APIs y memoria.
+El objetivo es completar tareas de varios pasos, no solo responder una pregunta aislada.</a:t>
+            </a:r>
+          </a:p>
+        </p:txBody>
+      </p:sp>
+      <p:sp>
+        <p:nvSpPr>
+          <p:cNvPr id="10" name="Rounded Rectangle 9"/>
           <p:cNvSpPr/>
           <p:nvPr/>
         </p:nvSpPr>
@@ -7596,12 +7424,13 @@
           <a:lstStyle/>
           <a:p>
             <a:pPr algn="ctr"/>
-          </a:p>
-        </p:txBody>
-      </p:sp>
-      <p:sp>
-        <p:nvSpPr>
-          <p:cNvPr id="10" name="TextBox 9"/>
+            <a:endParaRPr/>
+          </a:p>
+        </p:txBody>
+      </p:sp>
+      <p:sp>
+        <p:nvSpPr>
+          <p:cNvPr id="11" name="TextBox 10"/>
           <p:cNvSpPr txBox="1"/>
           <p:nvPr/>
         </p:nvSpPr>
@@ -7629,14 +7458,14 @@
                 </a:solidFill>
                 <a:latin typeface="Calibri"/>
               </a:rPr>
-              <a:t>Sistemas generativos</a:t>
-            </a:r>
-          </a:p>
-        </p:txBody>
-      </p:sp>
-      <p:sp>
-        <p:nvSpPr>
-          <p:cNvPr id="11" name="TextBox 10"/>
+              <a:t>Herramientas y RAG</a:t>
+            </a:r>
+          </a:p>
+        </p:txBody>
+      </p:sp>
+      <p:sp>
+        <p:nvSpPr>
+          <p:cNvPr id="12" name="TextBox 11"/>
           <p:cNvSpPr txBox="1"/>
           <p:nvPr/>
         </p:nvSpPr>
@@ -7664,15 +7493,15 @@
                 </a:solidFill>
                 <a:latin typeface="Calibri"/>
               </a:rPr>
-              <a:t>Difusión y variantes producen imagen, audio y video de alta fidelidad.
-Ya están integrados en herramientas creativas, de diseño y de producción, con debates sobre autoría y uso de datos.</a:t>
-            </a:r>
-          </a:p>
-        </p:txBody>
-      </p:sp>
-      <p:sp>
-        <p:nvSpPr>
-          <p:cNvPr id="12" name="Rectangle 11"/>
+              <a:t>La recuperación aumentada con documentos ancla las respuestas en fuentes externas y datos de una organización.
+Reduce alucinaciones, pero no las elimina: la calidad depende del índice, la consulta y el criterio de citación.</a:t>
+            </a:r>
+          </a:p>
+        </p:txBody>
+      </p:sp>
+      <p:sp>
+        <p:nvSpPr>
+          <p:cNvPr id="13" name="Rectangle 12"/>
           <p:cNvSpPr/>
           <p:nvPr/>
         </p:nvSpPr>
@@ -7710,12 +7539,13 @@
           <a:lstStyle/>
           <a:p>
             <a:pPr algn="ctr"/>
-          </a:p>
-        </p:txBody>
-      </p:sp>
-      <p:sp>
-        <p:nvSpPr>
-          <p:cNvPr id="13" name="TextBox 12"/>
+            <a:endParaRPr/>
+          </a:p>
+        </p:txBody>
+      </p:sp>
+      <p:sp>
+        <p:nvSpPr>
+          <p:cNvPr id="14" name="TextBox 13"/>
           <p:cNvSpPr txBox="1"/>
           <p:nvPr/>
         </p:nvSpPr>
@@ -7750,7 +7580,7 @@
       </p:sp>
       <p:sp>
         <p:nvSpPr>
-          <p:cNvPr id="14" name="TextBox 13"/>
+          <p:cNvPr id="15" name="TextBox 14"/>
           <p:cNvSpPr txBox="1"/>
           <p:nvPr/>
         </p:nvSpPr>
@@ -7778,7 +7608,7 @@
                 </a:solidFill>
                 <a:latin typeface="Calibri"/>
               </a:rPr>
-              <a:t>5 / 12</a:t>
+              <a:t>6 / 12</a:t>
             </a:r>
           </a:p>
         </p:txBody>
@@ -7792,7 +7622,7 @@
 </file>
 
 <file path=ppt/slides/slide6.xml><?xml version="1.0" encoding="utf-8"?>
-<p:sld xmlns:a="http://schemas.openxmlformats.org/drawingml/2006/main" xmlns:p="http://schemas.openxmlformats.org/presentationml/2006/main" xmlns:r="http://schemas.openxmlformats.org/officeDocument/2006/relationships">
+<p:sld xmlns:a="http://schemas.openxmlformats.org/drawingml/2006/main" xmlns:r="http://schemas.openxmlformats.org/officeDocument/2006/relationships" xmlns:p="http://schemas.openxmlformats.org/presentationml/2006/main">
   <p:cSld>
     <p:spTree>
       <p:nvGrpSpPr>
@@ -7800,7 +7630,14 @@
         <p:cNvGrpSpPr/>
         <p:nvPr/>
       </p:nvGrpSpPr>
-      <p:grpSpPr/>
+      <p:grpSpPr>
+        <a:xfrm>
+          <a:off x="0" y="0"/>
+          <a:ext cx="0" cy="0"/>
+          <a:chOff x="0" y="0"/>
+          <a:chExt cx="0" cy="0"/>
+        </a:xfrm>
+      </p:grpSpPr>
       <p:sp>
         <p:nvSpPr>
           <p:cNvPr id="2" name="Rectangle 1"/>
@@ -7841,6 +7678,7 @@
           <a:lstStyle/>
           <a:p>
             <a:pPr algn="ctr"/>
+            <a:endParaRPr/>
           </a:p>
         </p:txBody>
       </p:sp>
@@ -7884,6 +7722,7 @@
           <a:lstStyle/>
           <a:p>
             <a:pPr algn="ctr"/>
+            <a:endParaRPr/>
           </a:p>
         </p:txBody>
       </p:sp>
@@ -7917,7 +7756,7 @@
                 </a:solidFill>
                 <a:latin typeface="Calibri"/>
               </a:rPr>
-              <a:t>Agentes, herramientas y RAG</a:t>
+              <a:t>Ecosistema abierto y eficiencia</a:t>
             </a:r>
           </a:p>
         </p:txBody>
@@ -7962,47 +7801,13 @@
           <a:lstStyle/>
           <a:p>
             <a:pPr algn="ctr"/>
-          </a:p>
-        </p:txBody>
-      </p:sp>
-      <p:sp>
-        <p:nvSpPr>
-          <p:cNvPr id="6" name="TextBox 5"/>
-          <p:cNvSpPr txBox="1"/>
-          <p:nvPr/>
-        </p:nvSpPr>
-        <p:spPr>
-          <a:xfrm>
-            <a:off x="502920" y="932688"/>
-            <a:ext cx="11155680" cy="365760"/>
-          </a:xfrm>
-          <a:prstGeom prst="rect">
-            <a:avLst/>
-          </a:prstGeom>
-          <a:noFill/>
-        </p:spPr>
-        <p:txBody>
-          <a:bodyPr wrap="square">
-            <a:spAutoFit/>
-          </a:bodyPr>
-          <a:lstStyle/>
-          <a:p>
-            <a:pPr algn="l"/>
-            <a:r>
-              <a:rPr sz="1600" b="0" i="1">
-                <a:solidFill>
-                  <a:srgbClr val="5D6D7E"/>
-                </a:solidFill>
-                <a:latin typeface="Calibri"/>
-              </a:rPr>
-              <a:t>De generar texto a ejecutar tareas</a:t>
-            </a:r>
-          </a:p>
-        </p:txBody>
-      </p:sp>
-      <p:sp>
-        <p:nvSpPr>
-          <p:cNvPr id="7" name="Rounded Rectangle 6"/>
+            <a:endParaRPr/>
+          </a:p>
+        </p:txBody>
+      </p:sp>
+      <p:sp>
+        <p:nvSpPr>
+          <p:cNvPr id="6" name="Rounded Rectangle 5"/>
           <p:cNvSpPr/>
           <p:nvPr/>
         </p:nvSpPr>
@@ -8044,12 +7849,13 @@
           <a:lstStyle/>
           <a:p>
             <a:pPr algn="ctr"/>
-          </a:p>
-        </p:txBody>
-      </p:sp>
-      <p:sp>
-        <p:nvSpPr>
-          <p:cNvPr id="8" name="TextBox 7"/>
+            <a:endParaRPr/>
+          </a:p>
+        </p:txBody>
+      </p:sp>
+      <p:sp>
+        <p:nvSpPr>
+          <p:cNvPr id="7" name="TextBox 6"/>
           <p:cNvSpPr txBox="1"/>
           <p:nvPr/>
         </p:nvSpPr>
@@ -8077,14 +7883,14 @@
                 </a:solidFill>
                 <a:latin typeface="Calibri"/>
               </a:rPr>
-              <a:t>Agentes de IA</a:t>
-            </a:r>
-          </a:p>
-        </p:txBody>
-      </p:sp>
-      <p:sp>
-        <p:nvSpPr>
-          <p:cNvPr id="9" name="TextBox 8"/>
+              <a:t>Modelos abiertos y cerrados</a:t>
+            </a:r>
+          </a:p>
+        </p:txBody>
+      </p:sp>
+      <p:sp>
+        <p:nvSpPr>
+          <p:cNvPr id="8" name="TextBox 7"/>
           <p:cNvSpPr txBox="1"/>
           <p:nvPr/>
         </p:nvSpPr>
@@ -8112,15 +7918,15 @@
                 </a:solidFill>
                 <a:latin typeface="Calibri"/>
               </a:rPr>
-              <a:t>Combinan un modelo con herramientas: navegador, código, APIs y memoria.
-El objetivo es completar tareas de varios pasos, no solo responder una pregunta aislada.</a:t>
-            </a:r>
-          </a:p>
-        </p:txBody>
-      </p:sp>
-      <p:sp>
-        <p:nvSpPr>
-          <p:cNvPr id="10" name="Rounded Rectangle 9"/>
+              <a:t>Los pesos públicos o parcialmente abiertos coexisten con sistemas comerciales cerrados.
+Ambos impulsan investigación y productos, y alimentan el debate sobre gobernanza, reproducibilidad y concentración de poder.</a:t>
+            </a:r>
+          </a:p>
+        </p:txBody>
+      </p:sp>
+      <p:sp>
+        <p:nvSpPr>
+          <p:cNvPr id="9" name="Rounded Rectangle 8"/>
           <p:cNvSpPr/>
           <p:nvPr/>
         </p:nvSpPr>
@@ -8162,12 +7968,13 @@
           <a:lstStyle/>
           <a:p>
             <a:pPr algn="ctr"/>
-          </a:p>
-        </p:txBody>
-      </p:sp>
-      <p:sp>
-        <p:nvSpPr>
-          <p:cNvPr id="11" name="TextBox 10"/>
+            <a:endParaRPr/>
+          </a:p>
+        </p:txBody>
+      </p:sp>
+      <p:sp>
+        <p:nvSpPr>
+          <p:cNvPr id="10" name="TextBox 9"/>
           <p:cNvSpPr txBox="1"/>
           <p:nvPr/>
         </p:nvSpPr>
@@ -8195,14 +8002,14 @@
                 </a:solidFill>
                 <a:latin typeface="Calibri"/>
               </a:rPr>
-              <a:t>Herramientas y RAG</a:t>
-            </a:r>
-          </a:p>
-        </p:txBody>
-      </p:sp>
-      <p:sp>
-        <p:nvSpPr>
-          <p:cNvPr id="12" name="TextBox 11"/>
+              <a:t>Eficiencia como eje central</a:t>
+            </a:r>
+          </a:p>
+        </p:txBody>
+      </p:sp>
+      <p:sp>
+        <p:nvSpPr>
+          <p:cNvPr id="11" name="TextBox 10"/>
           <p:cNvSpPr txBox="1"/>
           <p:nvPr/>
         </p:nvSpPr>
@@ -8230,15 +8037,15 @@
                 </a:solidFill>
                 <a:latin typeface="Calibri"/>
               </a:rPr>
-              <a:t>La recuperación aumentada con documentos ancla las respuestas en fuentes externas y datos de una organización.
-Reduce alucinaciones, pero no las elimina: la calidad depende del índice, la consulta y el criterio de citación.</a:t>
-            </a:r>
-          </a:p>
-        </p:txBody>
-      </p:sp>
-      <p:sp>
-        <p:nvSpPr>
-          <p:cNvPr id="13" name="Rectangle 12"/>
+              <a:t>Mezcla de expertos (MoE), destilación, cuantización y modelos pequeños.
+Permiten desplegar IA en dispositivos, bajar costo y reducir impacto energético sin abandonar del todo la escala.</a:t>
+            </a:r>
+          </a:p>
+        </p:txBody>
+      </p:sp>
+      <p:sp>
+        <p:nvSpPr>
+          <p:cNvPr id="12" name="Rectangle 11"/>
           <p:cNvSpPr/>
           <p:nvPr/>
         </p:nvSpPr>
@@ -8276,12 +8083,13 @@
           <a:lstStyle/>
           <a:p>
             <a:pPr algn="ctr"/>
-          </a:p>
-        </p:txBody>
-      </p:sp>
-      <p:sp>
-        <p:nvSpPr>
-          <p:cNvPr id="14" name="TextBox 13"/>
+            <a:endParaRPr/>
+          </a:p>
+        </p:txBody>
+      </p:sp>
+      <p:sp>
+        <p:nvSpPr>
+          <p:cNvPr id="13" name="TextBox 12"/>
           <p:cNvSpPr txBox="1"/>
           <p:nvPr/>
         </p:nvSpPr>
@@ -8316,7 +8124,7 @@
       </p:sp>
       <p:sp>
         <p:nvSpPr>
-          <p:cNvPr id="15" name="TextBox 14"/>
+          <p:cNvPr id="14" name="TextBox 13"/>
           <p:cNvSpPr txBox="1"/>
           <p:nvPr/>
         </p:nvSpPr>
@@ -8344,7 +8152,7 @@
                 </a:solidFill>
                 <a:latin typeface="Calibri"/>
               </a:rPr>
-              <a:t>6 / 12</a:t>
+              <a:t>7 / 12</a:t>
             </a:r>
           </a:p>
         </p:txBody>
@@ -8358,7 +8166,7 @@
 </file>
 
 <file path=ppt/slides/slide7.xml><?xml version="1.0" encoding="utf-8"?>
-<p:sld xmlns:a="http://schemas.openxmlformats.org/drawingml/2006/main" xmlns:p="http://schemas.openxmlformats.org/presentationml/2006/main" xmlns:r="http://schemas.openxmlformats.org/officeDocument/2006/relationships">
+<p:sld xmlns:a="http://schemas.openxmlformats.org/drawingml/2006/main" xmlns:r="http://schemas.openxmlformats.org/officeDocument/2006/relationships" xmlns:p="http://schemas.openxmlformats.org/presentationml/2006/main">
   <p:cSld>
     <p:spTree>
       <p:nvGrpSpPr>
@@ -8366,7 +8174,14 @@
         <p:cNvGrpSpPr/>
         <p:nvPr/>
       </p:nvGrpSpPr>
-      <p:grpSpPr/>
+      <p:grpSpPr>
+        <a:xfrm>
+          <a:off x="0" y="0"/>
+          <a:ext cx="0" cy="0"/>
+          <a:chOff x="0" y="0"/>
+          <a:chExt cx="0" cy="0"/>
+        </a:xfrm>
+      </p:grpSpPr>
       <p:sp>
         <p:nvSpPr>
           <p:cNvPr id="2" name="Rectangle 1"/>
@@ -8407,6 +8222,7 @@
           <a:lstStyle/>
           <a:p>
             <a:pPr algn="ctr"/>
+            <a:endParaRPr/>
           </a:p>
         </p:txBody>
       </p:sp>
@@ -8450,6 +8266,7 @@
           <a:lstStyle/>
           <a:p>
             <a:pPr algn="ctr"/>
+            <a:endParaRPr/>
           </a:p>
         </p:txBody>
       </p:sp>
@@ -8483,7 +8300,7 @@
                 </a:solidFill>
                 <a:latin typeface="Calibri"/>
               </a:rPr>
-              <a:t>Ecosistema abierto y eficiencia</a:t>
+              <a:t>Visión por computadora y robótica</a:t>
             </a:r>
           </a:p>
         </p:txBody>
@@ -8528,6 +8345,7 @@
           <a:lstStyle/>
           <a:p>
             <a:pPr algn="ctr"/>
+            <a:endParaRPr/>
           </a:p>
         </p:txBody>
       </p:sp>
@@ -8575,6 +8393,7 @@
           <a:lstStyle/>
           <a:p>
             <a:pPr algn="ctr"/>
+            <a:endParaRPr/>
           </a:p>
         </p:txBody>
       </p:sp>
@@ -8608,7 +8427,7 @@
                 </a:solidFill>
                 <a:latin typeface="Calibri"/>
               </a:rPr>
-              <a:t>Modelos abiertos y cerrados</a:t>
+              <a:t>Visión por computadora</a:t>
             </a:r>
           </a:p>
         </p:txBody>
@@ -8643,8 +8462,8 @@
                 </a:solidFill>
                 <a:latin typeface="Calibri"/>
               </a:rPr>
-              <a:t>Los pesos públicos o parcialmente abiertos coexisten con sistemas comerciales cerrados.
-Ambos impulsan investigación y productos, y alimentan el debate sobre gobernanza, reproducibilidad y concentración de poder.</a:t>
+              <a:t>Más allá de la clasificación clásica: detección, segmentación y comprensión de escenas.
+Los modelos que conectan visión y lenguaje son el puente hacia asistentes y agentes multimodales.</a:t>
             </a:r>
           </a:p>
         </p:txBody>
@@ -8693,6 +8512,7 @@
           <a:lstStyle/>
           <a:p>
             <a:pPr algn="ctr"/>
+            <a:endParaRPr/>
           </a:p>
         </p:txBody>
       </p:sp>
@@ -8726,7 +8546,7 @@
                 </a:solidFill>
                 <a:latin typeface="Calibri"/>
               </a:rPr>
-              <a:t>Eficiencia como eje central</a:t>
+              <a:t>Robótica e IA encarnada</a:t>
             </a:r>
           </a:p>
         </p:txBody>
@@ -8761,8 +8581,8 @@
                 </a:solidFill>
                 <a:latin typeface="Calibri"/>
               </a:rPr>
-              <a:t>Mezcla de expertos (MoE), destilación, cuantización y modelos pequeños.
-Permiten desplegar IA en dispositivos, bajar costo y reducir impacto energético sin abandonar del todo la escala.</a:t>
+              <a:t>Avances en políticas entrenadas con datos diversos y modelos de mundo.
+La generalización en el mundo físico —contacto, incertidumbre, cuerpos reales— sigue siendo un reto abierto.</a:t>
             </a:r>
           </a:p>
         </p:txBody>
@@ -8807,6 +8627,7 @@
           <a:lstStyle/>
           <a:p>
             <a:pPr algn="ctr"/>
+            <a:endParaRPr/>
           </a:p>
         </p:txBody>
       </p:sp>
@@ -8875,7 +8696,7 @@
                 </a:solidFill>
                 <a:latin typeface="Calibri"/>
               </a:rPr>
-              <a:t>7 / 12</a:t>
+              <a:t>8 / 12</a:t>
             </a:r>
           </a:p>
         </p:txBody>
@@ -8889,7 +8710,7 @@
 </file>
 
 <file path=ppt/slides/slide8.xml><?xml version="1.0" encoding="utf-8"?>
-<p:sld xmlns:a="http://schemas.openxmlformats.org/drawingml/2006/main" xmlns:p="http://schemas.openxmlformats.org/presentationml/2006/main" xmlns:r="http://schemas.openxmlformats.org/officeDocument/2006/relationships">
+<p:sld xmlns:a="http://schemas.openxmlformats.org/drawingml/2006/main" xmlns:r="http://schemas.openxmlformats.org/officeDocument/2006/relationships" xmlns:p="http://schemas.openxmlformats.org/presentationml/2006/main">
   <p:cSld>
     <p:spTree>
       <p:nvGrpSpPr>
@@ -8897,7 +8718,14 @@
         <p:cNvGrpSpPr/>
         <p:nvPr/>
       </p:nvGrpSpPr>
-      <p:grpSpPr/>
+      <p:grpSpPr>
+        <a:xfrm>
+          <a:off x="0" y="0"/>
+          <a:ext cx="0" cy="0"/>
+          <a:chOff x="0" y="0"/>
+          <a:chExt cx="0" cy="0"/>
+        </a:xfrm>
+      </p:grpSpPr>
       <p:sp>
         <p:nvSpPr>
           <p:cNvPr id="2" name="Rectangle 1"/>
@@ -8938,6 +8766,7 @@
           <a:lstStyle/>
           <a:p>
             <a:pPr algn="ctr"/>
+            <a:endParaRPr/>
           </a:p>
         </p:txBody>
       </p:sp>
@@ -8981,6 +8810,7 @@
           <a:lstStyle/>
           <a:p>
             <a:pPr algn="ctr"/>
+            <a:endParaRPr/>
           </a:p>
         </p:txBody>
       </p:sp>
@@ -9014,7 +8844,7 @@
                 </a:solidFill>
                 <a:latin typeface="Calibri"/>
               </a:rPr>
-              <a:t>Visión por computadora y robótica</a:t>
+              <a:t>IA científica y alineación con preferencias</a:t>
             </a:r>
           </a:p>
         </p:txBody>
@@ -9059,6 +8889,7 @@
           <a:lstStyle/>
           <a:p>
             <a:pPr algn="ctr"/>
+            <a:endParaRPr/>
           </a:p>
         </p:txBody>
       </p:sp>
@@ -9106,6 +8937,7 @@
           <a:lstStyle/>
           <a:p>
             <a:pPr algn="ctr"/>
+            <a:endParaRPr/>
           </a:p>
         </p:txBody>
       </p:sp>
@@ -9139,7 +8971,7 @@
                 </a:solidFill>
                 <a:latin typeface="Calibri"/>
               </a:rPr>
-              <a:t>Visión por computadora</a:t>
+              <a:t>IA científica</a:t>
             </a:r>
           </a:p>
         </p:txBody>
@@ -9174,8 +9006,8 @@
                 </a:solidFill>
                 <a:latin typeface="Calibri"/>
               </a:rPr>
-              <a:t>Más allá de la clasificación clásica: detección, segmentación y comprensión de escenas.
-Los modelos que conectan visión y lenguaje son el puente hacia asistentes y agentes multimodales.</a:t>
+              <a:t>Acelera el descubrimiento en biología, química, clima y materiales (por ejemplo, predicción de estructuras y diseño de moléculas).
+Complementa la experimentación; no la reemplaza.</a:t>
             </a:r>
           </a:p>
         </p:txBody>
@@ -9224,6 +9056,7 @@
           <a:lstStyle/>
           <a:p>
             <a:pPr algn="ctr"/>
+            <a:endParaRPr/>
           </a:p>
         </p:txBody>
       </p:sp>
@@ -9257,7 +9090,7 @@
                 </a:solidFill>
                 <a:latin typeface="Calibri"/>
               </a:rPr>
-              <a:t>Robótica e IA encarnada</a:t>
+              <a:t>Aprendizaje por refuerzo y RLHF</a:t>
             </a:r>
           </a:p>
         </p:txBody>
@@ -9292,8 +9125,8 @@
                 </a:solidFill>
                 <a:latin typeface="Calibri"/>
               </a:rPr>
-              <a:t>Avances en políticas entrenadas con datos diversos y modelos de mundo.
-La generalización en el mundo físico —contacto, incertidumbre, cuerpos reales— sigue siendo un reto abierto.</a:t>
+              <a:t>El aprendizaje por refuerzo y la alineación con preferencias humanas (RLHF y variantes) hacen que los modelos sigan instrucciones.
+Son técnicas clave de utilidad y de seguridad, no un detalle de producto.</a:t>
             </a:r>
           </a:p>
         </p:txBody>
@@ -9338,6 +9171,7 @@
           <a:lstStyle/>
           <a:p>
             <a:pPr algn="ctr"/>
+            <a:endParaRPr/>
           </a:p>
         </p:txBody>
       </p:sp>
@@ -9406,7 +9240,7 @@
                 </a:solidFill>
                 <a:latin typeface="Calibri"/>
               </a:rPr>
-              <a:t>8 / 12</a:t>
+              <a:t>9 / 12</a:t>
             </a:r>
           </a:p>
         </p:txBody>
@@ -9420,7 +9254,7 @@
 </file>
 
 <file path=ppt/slides/slide9.xml><?xml version="1.0" encoding="utf-8"?>
-<p:sld xmlns:a="http://schemas.openxmlformats.org/drawingml/2006/main" xmlns:p="http://schemas.openxmlformats.org/presentationml/2006/main" xmlns:r="http://schemas.openxmlformats.org/officeDocument/2006/relationships">
+<p:sld xmlns:a="http://schemas.openxmlformats.org/drawingml/2006/main" xmlns:r="http://schemas.openxmlformats.org/officeDocument/2006/relationships" xmlns:p="http://schemas.openxmlformats.org/presentationml/2006/main">
   <p:cSld>
     <p:spTree>
       <p:nvGrpSpPr>
@@ -9428,7 +9262,14 @@
         <p:cNvGrpSpPr/>
         <p:nvPr/>
       </p:nvGrpSpPr>
-      <p:grpSpPr/>
+      <p:grpSpPr>
+        <a:xfrm>
+          <a:off x="0" y="0"/>
+          <a:ext cx="0" cy="0"/>
+          <a:chOff x="0" y="0"/>
+          <a:chExt cx="0" cy="0"/>
+        </a:xfrm>
+      </p:grpSpPr>
       <p:sp>
         <p:nvSpPr>
           <p:cNvPr id="2" name="Rectangle 1"/>
@@ -9469,6 +9310,7 @@
           <a:lstStyle/>
           <a:p>
             <a:pPr algn="ctr"/>
+            <a:endParaRPr/>
           </a:p>
         </p:txBody>
       </p:sp>
@@ -9512,6 +9354,7 @@
           <a:lstStyle/>
           <a:p>
             <a:pPr algn="ctr"/>
+            <a:endParaRPr/>
           </a:p>
         </p:txBody>
       </p:sp>
@@ -9545,7 +9388,7 @@
                 </a:solidFill>
                 <a:latin typeface="Calibri"/>
               </a:rPr>
-              <a:t>IA científica y alineación con preferencias</a:t>
+              <a:t>Evaluación, seguridad y gobernanza</a:t>
             </a:r>
           </a:p>
         </p:txBody>
@@ -9590,66 +9433,20 @@
           <a:lstStyle/>
           <a:p>
             <a:pPr algn="ctr"/>
-          </a:p>
-        </p:txBody>
-      </p:sp>
-      <p:sp>
-        <p:nvSpPr>
-          <p:cNvPr id="6" name="Rounded Rectangle 5"/>
-          <p:cNvSpPr/>
-          <p:nvPr/>
-        </p:nvSpPr>
-        <p:spPr>
-          <a:xfrm>
-            <a:off x="457200" y="1371600"/>
-            <a:ext cx="5486400" cy="4480560"/>
-          </a:xfrm>
-          <a:prstGeom prst="roundRect">
-            <a:avLst>
-              <a:gd name="adj" fmla="val 8000"/>
-            </a:avLst>
-          </a:prstGeom>
-          <a:solidFill>
-            <a:srgbClr val="F6F8FB"/>
-          </a:solidFill>
-          <a:ln>
-            <a:solidFill>
-              <a:srgbClr val="D5DEE8"/>
-            </a:solidFill>
-          </a:ln>
-        </p:spPr>
-        <p:style>
-          <a:lnRef idx="1">
-            <a:schemeClr val="accent1"/>
-          </a:lnRef>
-          <a:fillRef idx="3">
-            <a:schemeClr val="accent1"/>
-          </a:fillRef>
-          <a:effectRef idx="2">
-            <a:schemeClr val="accent1"/>
-          </a:effectRef>
-          <a:fontRef idx="minor">
-            <a:schemeClr val="lt1"/>
-          </a:fontRef>
-        </p:style>
-        <p:txBody>
-          <a:bodyPr rtlCol="0" anchor="ctr"/>
-          <a:lstStyle/>
-          <a:p>
-            <a:pPr algn="ctr"/>
-          </a:p>
-        </p:txBody>
-      </p:sp>
-      <p:sp>
-        <p:nvSpPr>
-          <p:cNvPr id="7" name="TextBox 6"/>
+            <a:endParaRPr/>
+          </a:p>
+        </p:txBody>
+      </p:sp>
+      <p:sp>
+        <p:nvSpPr>
+          <p:cNvPr id="6" name="TextBox 5"/>
           <p:cNvSpPr txBox="1"/>
           <p:nvPr/>
         </p:nvSpPr>
         <p:spPr>
           <a:xfrm>
-            <a:off x="658368" y="1536192"/>
-            <a:ext cx="5120640" cy="365760"/>
+            <a:off x="640080" y="1325880"/>
+            <a:ext cx="10972800" cy="5029200"/>
           </a:xfrm>
           <a:prstGeom prst="rect">
             <a:avLst/>
@@ -9662,176 +9459,86 @@
           </a:bodyPr>
           <a:lstStyle/>
           <a:p>
-            <a:pPr algn="l"/>
-            <a:r>
-              <a:rPr sz="1600" b="1" i="0">
-                <a:solidFill>
-                  <a:srgbClr val="0F2C59"/>
+            <a:pPr algn="l">
+              <a:lnSpc>
+                <a:spcPct val="115000"/>
+              </a:lnSpc>
+              <a:spcAft>
+                <a:spcPts val="1400"/>
+              </a:spcAft>
+            </a:pPr>
+            <a:r>
+              <a:rPr sz="2000" b="0" i="0">
+                <a:solidFill>
+                  <a:srgbClr val="2C3E50"/>
                 </a:solidFill>
                 <a:latin typeface="Calibri"/>
               </a:rPr>
-              <a:t>IA científica</a:t>
-            </a:r>
-          </a:p>
-        </p:txBody>
-      </p:sp>
-      <p:sp>
-        <p:nvSpPr>
-          <p:cNvPr id="8" name="TextBox 7"/>
-          <p:cNvSpPr txBox="1"/>
-          <p:nvPr/>
-        </p:nvSpPr>
-        <p:spPr>
-          <a:xfrm>
-            <a:off x="658368" y="1901952"/>
-            <a:ext cx="5120640" cy="3794760"/>
-          </a:xfrm>
-          <a:prstGeom prst="rect">
-            <a:avLst/>
-          </a:prstGeom>
-          <a:noFill/>
-        </p:spPr>
-        <p:txBody>
-          <a:bodyPr wrap="square">
-            <a:spAutoFit/>
-          </a:bodyPr>
-          <a:lstStyle/>
-          <a:p>
-            <a:pPr algn="l"/>
-            <a:r>
-              <a:rPr sz="1400" b="0" i="0">
+              <a:t>•  La evaluación es un cuello de botella: los benchmarks se saturan rápido.</a:t>
+            </a:r>
+          </a:p>
+          <a:p>
+            <a:pPr algn="l">
+              <a:lnSpc>
+                <a:spcPct val="115000"/>
+              </a:lnSpc>
+              <a:spcAft>
+                <a:spcPts val="1400"/>
+              </a:spcAft>
+            </a:pPr>
+            <a:r>
+              <a:rPr sz="2000" b="0" i="0">
                 <a:solidFill>
                   <a:srgbClr val="2C3E50"/>
                 </a:solidFill>
                 <a:latin typeface="Calibri"/>
               </a:rPr>
-              <a:t>Acelera el descubrimiento en biología, química, clima y materiales (por ejemplo, predicción de estructuras y diseño de moléculas).
-Complementa la experimentación; no la reemplaza.</a:t>
-            </a:r>
-          </a:p>
-        </p:txBody>
-      </p:sp>
-      <p:sp>
-        <p:nvSpPr>
-          <p:cNvPr id="9" name="Rounded Rectangle 8"/>
-          <p:cNvSpPr/>
-          <p:nvPr/>
-        </p:nvSpPr>
-        <p:spPr>
-          <a:xfrm>
-            <a:off x="6172200" y="1371600"/>
-            <a:ext cx="5486400" cy="4480560"/>
-          </a:xfrm>
-          <a:prstGeom prst="roundRect">
-            <a:avLst>
-              <a:gd name="adj" fmla="val 8000"/>
-            </a:avLst>
-          </a:prstGeom>
-          <a:solidFill>
-            <a:srgbClr val="F6F8FB"/>
-          </a:solidFill>
-          <a:ln>
-            <a:solidFill>
-              <a:srgbClr val="D5DEE8"/>
-            </a:solidFill>
-          </a:ln>
-        </p:spPr>
-        <p:style>
-          <a:lnRef idx="1">
-            <a:schemeClr val="accent1"/>
-          </a:lnRef>
-          <a:fillRef idx="3">
-            <a:schemeClr val="accent1"/>
-          </a:fillRef>
-          <a:effectRef idx="2">
-            <a:schemeClr val="accent1"/>
-          </a:effectRef>
-          <a:fontRef idx="minor">
-            <a:schemeClr val="lt1"/>
-          </a:fontRef>
-        </p:style>
-        <p:txBody>
-          <a:bodyPr rtlCol="0" anchor="ctr"/>
-          <a:lstStyle/>
-          <a:p>
-            <a:pPr algn="ctr"/>
-          </a:p>
-        </p:txBody>
-      </p:sp>
-      <p:sp>
-        <p:nvSpPr>
-          <p:cNvPr id="10" name="TextBox 9"/>
-          <p:cNvSpPr txBox="1"/>
-          <p:nvPr/>
-        </p:nvSpPr>
-        <p:spPr>
-          <a:xfrm>
-            <a:off x="6373368" y="1536192"/>
-            <a:ext cx="5120640" cy="365760"/>
-          </a:xfrm>
-          <a:prstGeom prst="rect">
-            <a:avLst/>
-          </a:prstGeom>
-          <a:noFill/>
-        </p:spPr>
-        <p:txBody>
-          <a:bodyPr wrap="square">
-            <a:spAutoFit/>
-          </a:bodyPr>
-          <a:lstStyle/>
-          <a:p>
-            <a:pPr algn="l"/>
-            <a:r>
-              <a:rPr sz="1600" b="1" i="0">
-                <a:solidFill>
-                  <a:srgbClr val="0F2C59"/>
+              <a:t>•  Se necesitan pruebas de capacidades reales, robustez, sesgo, seguridad y desempeño fuera de distribución.</a:t>
+            </a:r>
+          </a:p>
+          <a:p>
+            <a:pPr algn="l">
+              <a:lnSpc>
+                <a:spcPct val="115000"/>
+              </a:lnSpc>
+              <a:spcAft>
+                <a:spcPts val="1400"/>
+              </a:spcAft>
+            </a:pPr>
+            <a:r>
+              <a:rPr sz="2000" b="0" i="0">
+                <a:solidFill>
+                  <a:srgbClr val="2C3E50"/>
                 </a:solidFill>
                 <a:latin typeface="Calibri"/>
               </a:rPr>
-              <a:t>Aprendizaje por refuerzo y RLHF</a:t>
-            </a:r>
-          </a:p>
-        </p:txBody>
-      </p:sp>
-      <p:sp>
-        <p:nvSpPr>
-          <p:cNvPr id="11" name="TextBox 10"/>
-          <p:cNvSpPr txBox="1"/>
-          <p:nvPr/>
-        </p:nvSpPr>
-        <p:spPr>
-          <a:xfrm>
-            <a:off x="6373368" y="1901952"/>
-            <a:ext cx="5120640" cy="3794760"/>
-          </a:xfrm>
-          <a:prstGeom prst="rect">
-            <a:avLst/>
-          </a:prstGeom>
-          <a:noFill/>
-        </p:spPr>
-        <p:txBody>
-          <a:bodyPr wrap="square">
-            <a:spAutoFit/>
-          </a:bodyPr>
-          <a:lstStyle/>
-          <a:p>
-            <a:pPr algn="l"/>
-            <a:r>
-              <a:rPr sz="1400" b="0" i="0">
+              <a:t>•  Seguridad y gobernanza cubren uso dual, privacidad, propiedad intelectual, sesgos y autonomía de agentes.</a:t>
+            </a:r>
+          </a:p>
+          <a:p>
+            <a:pPr algn="l">
+              <a:lnSpc>
+                <a:spcPct val="115000"/>
+              </a:lnSpc>
+              <a:spcAft>
+                <a:spcPts val="1400"/>
+              </a:spcAft>
+            </a:pPr>
+            <a:r>
+              <a:rPr sz="2000" b="0" i="0">
                 <a:solidFill>
                   <a:srgbClr val="2C3E50"/>
                 </a:solidFill>
                 <a:latin typeface="Calibri"/>
               </a:rPr>
-              <a:t>El aprendizaje por refuerzo y la alineación con preferencias humanas (RLHF y variantes) hacen que los modelos sigan instrucciones.
-Son técnicas clave de utilidad y de seguridad, no un detalle de producto.</a:t>
-            </a:r>
-          </a:p>
-        </p:txBody>
-      </p:sp>
-      <p:sp>
-        <p:nvSpPr>
-          <p:cNvPr id="12" name="Rectangle 11"/>
+              <a:t>•  Estos temas son parte del estado del arte tanto como las arquitecturas y el hardware.</a:t>
+            </a:r>
+          </a:p>
+        </p:txBody>
+      </p:sp>
+      <p:sp>
+        <p:nvSpPr>
+          <p:cNvPr id="7" name="Rectangle 6"/>
           <p:cNvSpPr/>
           <p:nvPr/>
         </p:nvSpPr>
@@ -9869,12 +9576,13 @@
           <a:lstStyle/>
           <a:p>
             <a:pPr algn="ctr"/>
-          </a:p>
-        </p:txBody>
-      </p:sp>
-      <p:sp>
-        <p:nvSpPr>
-          <p:cNvPr id="13" name="TextBox 12"/>
+            <a:endParaRPr/>
+          </a:p>
+        </p:txBody>
+      </p:sp>
+      <p:sp>
+        <p:nvSpPr>
+          <p:cNvPr id="8" name="TextBox 7"/>
           <p:cNvSpPr txBox="1"/>
           <p:nvPr/>
         </p:nvSpPr>
@@ -9909,7 +9617,7 @@
       </p:sp>
       <p:sp>
         <p:nvSpPr>
-          <p:cNvPr id="14" name="TextBox 13"/>
+          <p:cNvPr id="9" name="TextBox 8"/>
           <p:cNvSpPr txBox="1"/>
           <p:nvPr/>
         </p:nvSpPr>
@@ -9937,7 +9645,7 @@
                 </a:solidFill>
                 <a:latin typeface="Calibri"/>
               </a:rPr>
-              <a:t>9 / 12</a:t>
+              <a:t>10 / 12</a:t>
             </a:r>
           </a:p>
         </p:txBody>
